--- a/docs/SUPONE_AI_Club_Informatique_SUPPTIC.pptx
+++ b/docs/SUPONE_AI_Club_Informatique_SUPPTIC.pptx
@@ -17,6 +17,11 @@
     <p:sldId id="265" r:id="rId16"/>
     <p:sldId id="266" r:id="rId17"/>
     <p:sldId id="267" r:id="rId18"/>
+    <p:sldId id="268" r:id="rId19"/>
+    <p:sldId id="269" r:id="rId20"/>
+    <p:sldId id="270" r:id="rId21"/>
+    <p:sldId id="271" r:id="rId22"/>
+    <p:sldId id="272" r:id="rId23"/>
   </p:sldIdLst>
   <p:sldSz cx="9144000" cy="6858000" type="screen4x3"/>
   <p:notesSz cx="6858000" cy="9144000"/>
@@ -3091,6 +3096,9 @@
 
 <file path=ppt/slides/slide1.xml><?xml version="1.0" encoding="utf-8"?>
 <p:sld xmlns:a="http://schemas.openxmlformats.org/drawingml/2006/main" xmlns:p="http://schemas.openxmlformats.org/presentationml/2006/main" xmlns:r="http://schemas.openxmlformats.org/officeDocument/2006/relationships">
+  <p:transition>
+    <p:push dir="l"/>
+  </p:transition>
   <p:cSld>
     <p:bg>
       <p:bgPr>
@@ -3267,6 +3275,151 @@
           </a:p>
         </p:txBody>
       </p:sp>
+      <p:pic>
+        <p:nvPicPr>
+          <p:cNvPr id="6" name="Picture 5" descr="icone.png"/>
+          <p:cNvPicPr>
+            <a:picLocks noChangeAspect="1"/>
+          </p:cNvPicPr>
+          <p:nvPr/>
+        </p:nvPicPr>
+        <p:blipFill>
+          <a:blip r:embed="rId2"/>
+          <a:stretch>
+            <a:fillRect/>
+          </a:stretch>
+        </p:blipFill>
+        <p:spPr>
+          <a:xfrm>
+            <a:off x="8412480" y="6126480"/>
+            <a:ext cx="548640" cy="548640"/>
+          </a:xfrm>
+          <a:prstGeom prst="rect">
+            <a:avLst/>
+          </a:prstGeom>
+        </p:spPr>
+      </p:pic>
+      <p:sp>
+        <p:nvSpPr>
+          <p:cNvPr id="7" name="TextBox 6"/>
+          <p:cNvSpPr txBox="1"/>
+          <p:nvPr/>
+        </p:nvSpPr>
+        <p:spPr>
+          <a:xfrm>
+            <a:off x="0" y="6492240"/>
+            <a:ext cx="9144000" cy="274320"/>
+          </a:xfrm>
+          <a:prstGeom prst="rect">
+            <a:avLst/>
+          </a:prstGeom>
+          <a:noFill/>
+        </p:spPr>
+        <p:txBody>
+          <a:bodyPr wrap="none">
+            <a:spAutoFit/>
+          </a:bodyPr>
+          <a:lstStyle/>
+          <a:p>
+            <a:pPr algn="ctr">
+              <a:defRPr sz="900">
+                <a:solidFill>
+                  <a:srgbClr val="64748B"/>
+                </a:solidFill>
+              </a:defRPr>
+            </a:pPr>
+            <a:r>
+              <a:t>SUP'ONE AI — Page 1 / 17</a:t>
+            </a:r>
+          </a:p>
+        </p:txBody>
+      </p:sp>
+      <p:sp>
+        <p:nvSpPr>
+          <p:cNvPr id="8" name="Rectangle 7"/>
+          <p:cNvSpPr/>
+          <p:nvPr/>
+        </p:nvSpPr>
+        <p:spPr>
+          <a:xfrm>
+            <a:off x="0" y="6812280"/>
+            <a:ext cx="9144000" cy="45720"/>
+          </a:xfrm>
+          <a:prstGeom prst="rect">
+            <a:avLst/>
+          </a:prstGeom>
+          <a:solidFill>
+            <a:srgbClr val="E2E8F0"/>
+          </a:solidFill>
+          <a:ln>
+            <a:noFill/>
+          </a:ln>
+        </p:spPr>
+        <p:style>
+          <a:lnRef idx="1">
+            <a:schemeClr val="accent1"/>
+          </a:lnRef>
+          <a:fillRef idx="3">
+            <a:schemeClr val="accent1"/>
+          </a:fillRef>
+          <a:effectRef idx="2">
+            <a:schemeClr val="accent1"/>
+          </a:effectRef>
+          <a:fontRef idx="minor">
+            <a:schemeClr val="lt1"/>
+          </a:fontRef>
+        </p:style>
+        <p:txBody>
+          <a:bodyPr rtlCol="0" anchor="ctr"/>
+          <a:lstStyle/>
+          <a:p>
+            <a:pPr algn="ctr"/>
+          </a:p>
+        </p:txBody>
+      </p:sp>
+      <p:sp>
+        <p:nvSpPr>
+          <p:cNvPr id="9" name="Rectangle 8"/>
+          <p:cNvSpPr/>
+          <p:nvPr/>
+        </p:nvSpPr>
+        <p:spPr>
+          <a:xfrm>
+            <a:off x="0" y="6812280"/>
+            <a:ext cx="537882" cy="45720"/>
+          </a:xfrm>
+          <a:prstGeom prst="rect">
+            <a:avLst/>
+          </a:prstGeom>
+          <a:solidFill>
+            <a:srgbClr val="3B82F6"/>
+          </a:solidFill>
+          <a:ln>
+            <a:noFill/>
+          </a:ln>
+        </p:spPr>
+        <p:style>
+          <a:lnRef idx="1">
+            <a:schemeClr val="accent1"/>
+          </a:lnRef>
+          <a:fillRef idx="3">
+            <a:schemeClr val="accent1"/>
+          </a:fillRef>
+          <a:effectRef idx="2">
+            <a:schemeClr val="accent1"/>
+          </a:effectRef>
+          <a:fontRef idx="minor">
+            <a:schemeClr val="lt1"/>
+          </a:fontRef>
+        </p:style>
+        <p:txBody>
+          <a:bodyPr rtlCol="0" anchor="ctr"/>
+          <a:lstStyle/>
+          <a:p>
+            <a:pPr algn="ctr"/>
+          </a:p>
+        </p:txBody>
+      </p:sp>
     </p:spTree>
   </p:cSld>
   <p:clrMapOvr>
@@ -3277,6 +3430,9 @@
 
 <file path=ppt/slides/slide10.xml><?xml version="1.0" encoding="utf-8"?>
 <p:sld xmlns:a="http://schemas.openxmlformats.org/drawingml/2006/main" xmlns:p="http://schemas.openxmlformats.org/presentationml/2006/main" xmlns:r="http://schemas.openxmlformats.org/officeDocument/2006/relationships">
+  <p:transition>
+    <p:push dir="l"/>
+  </p:transition>
   <p:cSld>
     <p:bg>
       <p:bgPr>
@@ -3340,7 +3496,7 @@
               </a:defRPr>
             </a:pPr>
             <a:r>
-              <a:t>Démonstration &amp; chiffres</a:t>
+              <a:t>Stack technique</a:t>
             </a:r>
           </a:p>
         </p:txBody>
@@ -3353,8 +3509,8 @@
         </p:nvSpPr>
         <p:spPr>
           <a:xfrm>
-            <a:off x="548640" y="1737360"/>
-            <a:ext cx="8046720" cy="4572000"/>
+            <a:off x="457200" y="1645920"/>
+            <a:ext cx="3931920" cy="365760"/>
           </a:xfrm>
           <a:prstGeom prst="rect">
             <a:avLst/>
@@ -3362,99 +3518,397 @@
           <a:noFill/>
         </p:spPr>
         <p:txBody>
-          <a:bodyPr wrap="square">
+          <a:bodyPr wrap="none">
             <a:spAutoFit/>
           </a:bodyPr>
           <a:lstStyle/>
           <a:p>
             <a:pPr>
+              <a:defRPr sz="1600" b="1">
+                <a:solidFill>
+                  <a:srgbClr val="1A4594"/>
+                </a:solidFill>
+              </a:defRPr>
+            </a:pPr>
+            <a:r>
+              <a:t>Backend</a:t>
+            </a:r>
+          </a:p>
+        </p:txBody>
+      </p:sp>
+      <p:sp>
+        <p:nvSpPr>
+          <p:cNvPr id="4" name="TextBox 3"/>
+          <p:cNvSpPr txBox="1"/>
+          <p:nvPr/>
+        </p:nvSpPr>
+        <p:spPr>
+          <a:xfrm>
+            <a:off x="457200" y="2011680"/>
+            <a:ext cx="3931920" cy="4114800"/>
+          </a:xfrm>
+          <a:prstGeom prst="rect">
+            <a:avLst/>
+          </a:prstGeom>
+          <a:noFill/>
+        </p:spPr>
+        <p:txBody>
+          <a:bodyPr wrap="none">
+            <a:spAutoFit/>
+          </a:bodyPr>
+          <a:lstStyle/>
+          <a:p>
+            <a:pPr>
               <a:spcAft>
-                <a:spcPts val="1000"/>
+                <a:spcPts val="600"/>
               </a:spcAft>
-              <a:defRPr sz="1800">
+              <a:defRPr sz="1400">
                 <a:solidFill>
                   <a:srgbClr val="070F1F"/>
                 </a:solidFill>
               </a:defRPr>
             </a:pPr>
             <a:r>
-              <a:t>Démarrage local : backend :8001 + frontend :5174</a:t>
+              <a:t>• Python 3.13 · Django 4.2 · DRF</a:t>
             </a:r>
           </a:p>
           <a:p>
             <a:pPr>
               <a:spcAft>
-                <a:spcPts val="1000"/>
+                <a:spcPts val="600"/>
               </a:spcAft>
-              <a:defRPr sz="1800">
+              <a:defRPr sz="1400">
                 <a:solidFill>
                   <a:srgbClr val="070F1F"/>
                 </a:solidFill>
               </a:defRPr>
             </a:pPr>
             <a:r>
-              <a:t>Base FAQ : plus de 11 000 questions/réponses indexées</a:t>
+              <a:t>• scikit-learn · spaCy (fr)</a:t>
             </a:r>
           </a:p>
           <a:p>
             <a:pPr>
               <a:spcAft>
-                <a:spcPts val="1000"/>
+                <a:spcPts val="600"/>
               </a:spcAft>
-              <a:defRPr sz="1800">
+              <a:defRPr sz="1400">
                 <a:solidFill>
                   <a:srgbClr val="070F1F"/>
                 </a:solidFill>
               </a:defRPr>
             </a:pPr>
             <a:r>
-              <a:t>Catégories : admissions, examens, filières, vie étudiante, règlements…</a:t>
+              <a:t>• FAISS · sentence-transformers</a:t>
             </a:r>
           </a:p>
           <a:p>
             <a:pPr>
               <a:spcAft>
-                <a:spcPts val="1000"/>
+                <a:spcPts val="600"/>
               </a:spcAft>
-              <a:defRPr sz="1800">
+              <a:defRPr sz="1400">
                 <a:solidFill>
                   <a:srgbClr val="070F1F"/>
                 </a:solidFill>
               </a:defRPr>
             </a:pPr>
             <a:r>
-              <a:t>Tests automatisés : 22 tests Django + suite Gen3/feedback</a:t>
+              <a:t>• Google Gemini 1.5 Flash</a:t>
             </a:r>
           </a:p>
           <a:p>
             <a:pPr>
               <a:spcAft>
-                <a:spcPts val="1000"/>
+                <a:spcPts val="600"/>
               </a:spcAft>
-              <a:defRPr sz="1800">
+              <a:defRPr sz="1400">
                 <a:solidFill>
                   <a:srgbClr val="070F1F"/>
                 </a:solidFill>
               </a:defRPr>
             </a:pPr>
             <a:r>
-              <a:t>Exemples de questions : « Comment s'inscrire ? », « Quels sont les frais ? »</a:t>
-            </a:r>
-          </a:p>
+              <a:t>• PostgreSQL · Gunicorn · Whitenoise</a:t>
+            </a:r>
+          </a:p>
+        </p:txBody>
+      </p:sp>
+      <p:sp>
+        <p:nvSpPr>
+          <p:cNvPr id="5" name="TextBox 4"/>
+          <p:cNvSpPr txBox="1"/>
+          <p:nvPr/>
+        </p:nvSpPr>
+        <p:spPr>
+          <a:xfrm>
+            <a:off x="4754880" y="1645920"/>
+            <a:ext cx="3931920" cy="365760"/>
+          </a:xfrm>
+          <a:prstGeom prst="rect">
+            <a:avLst/>
+          </a:prstGeom>
+          <a:noFill/>
+        </p:spPr>
+        <p:txBody>
+          <a:bodyPr wrap="none">
+            <a:spAutoFit/>
+          </a:bodyPr>
+          <a:lstStyle/>
+          <a:p>
+            <a:pPr>
+              <a:defRPr sz="1600" b="1">
+                <a:solidFill>
+                  <a:srgbClr val="1A4594"/>
+                </a:solidFill>
+              </a:defRPr>
+            </a:pPr>
+            <a:r>
+              <a:t>Frontend &amp; DevOps</a:t>
+            </a:r>
+          </a:p>
+        </p:txBody>
+      </p:sp>
+      <p:sp>
+        <p:nvSpPr>
+          <p:cNvPr id="6" name="TextBox 5"/>
+          <p:cNvSpPr txBox="1"/>
+          <p:nvPr/>
+        </p:nvSpPr>
+        <p:spPr>
+          <a:xfrm>
+            <a:off x="4754880" y="2011680"/>
+            <a:ext cx="3931920" cy="4114800"/>
+          </a:xfrm>
+          <a:prstGeom prst="rect">
+            <a:avLst/>
+          </a:prstGeom>
+          <a:noFill/>
+        </p:spPr>
+        <p:txBody>
+          <a:bodyPr wrap="none">
+            <a:spAutoFit/>
+          </a:bodyPr>
+          <a:lstStyle/>
           <a:p>
             <a:pPr>
               <a:spcAft>
-                <a:spcPts val="1000"/>
+                <a:spcPts val="600"/>
               </a:spcAft>
-              <a:defRPr sz="1800">
+              <a:defRPr sz="1400">
                 <a:solidFill>
                   <a:srgbClr val="070F1F"/>
                 </a:solidFill>
               </a:defRPr>
             </a:pPr>
             <a:r>
-              <a:t>Endpoint santé : GET /api/health/ → status, phase1, gen3</a:t>
-            </a:r>
+              <a:t>• React 19 · Vite 8 · PWA</a:t>
+            </a:r>
+          </a:p>
+          <a:p>
+            <a:pPr>
+              <a:spcAft>
+                <a:spcPts val="600"/>
+              </a:spcAft>
+              <a:defRPr sz="1400">
+                <a:solidFill>
+                  <a:srgbClr val="070F1F"/>
+                </a:solidFill>
+              </a:defRPr>
+            </a:pPr>
+            <a:r>
+              <a:t>• Capacitor 7 (APK Android)</a:t>
+            </a:r>
+          </a:p>
+          <a:p>
+            <a:pPr>
+              <a:spcAft>
+                <a:spcPts val="600"/>
+              </a:spcAft>
+              <a:defRPr sz="1400">
+                <a:solidFill>
+                  <a:srgbClr val="070F1F"/>
+                </a:solidFill>
+              </a:defRPr>
+            </a:pPr>
+            <a:r>
+              <a:t>• Docker Compose (3 services)</a:t>
+            </a:r>
+          </a:p>
+          <a:p>
+            <a:pPr>
+              <a:spcAft>
+                <a:spcPts val="600"/>
+              </a:spcAft>
+              <a:defRPr sz="1400">
+                <a:solidFill>
+                  <a:srgbClr val="070F1F"/>
+                </a:solidFill>
+              </a:defRPr>
+            </a:pPr>
+            <a:r>
+              <a:t>• Railway · Netlify · GitHub Actions</a:t>
+            </a:r>
+          </a:p>
+          <a:p>
+            <a:pPr>
+              <a:spcAft>
+                <a:spcPts val="600"/>
+              </a:spcAft>
+              <a:defRPr sz="1400">
+                <a:solidFill>
+                  <a:srgbClr val="070F1F"/>
+                </a:solidFill>
+              </a:defRPr>
+            </a:pPr>
+            <a:r>
+              <a:t>• Nginx · healthchecks · volumes ML</a:t>
+            </a:r>
+          </a:p>
+        </p:txBody>
+      </p:sp>
+      <p:pic>
+        <p:nvPicPr>
+          <p:cNvPr id="7" name="Picture 6" descr="icone.png"/>
+          <p:cNvPicPr>
+            <a:picLocks noChangeAspect="1"/>
+          </p:cNvPicPr>
+          <p:nvPr/>
+        </p:nvPicPr>
+        <p:blipFill>
+          <a:blip r:embed="rId2"/>
+          <a:stretch>
+            <a:fillRect/>
+          </a:stretch>
+        </p:blipFill>
+        <p:spPr>
+          <a:xfrm>
+            <a:off x="8412480" y="6126480"/>
+            <a:ext cx="548640" cy="548640"/>
+          </a:xfrm>
+          <a:prstGeom prst="rect">
+            <a:avLst/>
+          </a:prstGeom>
+        </p:spPr>
+      </p:pic>
+      <p:sp>
+        <p:nvSpPr>
+          <p:cNvPr id="8" name="TextBox 7"/>
+          <p:cNvSpPr txBox="1"/>
+          <p:nvPr/>
+        </p:nvSpPr>
+        <p:spPr>
+          <a:xfrm>
+            <a:off x="0" y="6492240"/>
+            <a:ext cx="9144000" cy="274320"/>
+          </a:xfrm>
+          <a:prstGeom prst="rect">
+            <a:avLst/>
+          </a:prstGeom>
+          <a:noFill/>
+        </p:spPr>
+        <p:txBody>
+          <a:bodyPr wrap="none">
+            <a:spAutoFit/>
+          </a:bodyPr>
+          <a:lstStyle/>
+          <a:p>
+            <a:pPr algn="ctr">
+              <a:defRPr sz="900">
+                <a:solidFill>
+                  <a:srgbClr val="64748B"/>
+                </a:solidFill>
+              </a:defRPr>
+            </a:pPr>
+            <a:r>
+              <a:t>SUP'ONE AI — Page 10 / 17</a:t>
+            </a:r>
+          </a:p>
+        </p:txBody>
+      </p:sp>
+      <p:sp>
+        <p:nvSpPr>
+          <p:cNvPr id="9" name="Rectangle 8"/>
+          <p:cNvSpPr/>
+          <p:nvPr/>
+        </p:nvSpPr>
+        <p:spPr>
+          <a:xfrm>
+            <a:off x="0" y="6812280"/>
+            <a:ext cx="9144000" cy="45720"/>
+          </a:xfrm>
+          <a:prstGeom prst="rect">
+            <a:avLst/>
+          </a:prstGeom>
+          <a:solidFill>
+            <a:srgbClr val="E2E8F0"/>
+          </a:solidFill>
+          <a:ln>
+            <a:noFill/>
+          </a:ln>
+        </p:spPr>
+        <p:style>
+          <a:lnRef idx="1">
+            <a:schemeClr val="accent1"/>
+          </a:lnRef>
+          <a:fillRef idx="3">
+            <a:schemeClr val="accent1"/>
+          </a:fillRef>
+          <a:effectRef idx="2">
+            <a:schemeClr val="accent1"/>
+          </a:effectRef>
+          <a:fontRef idx="minor">
+            <a:schemeClr val="lt1"/>
+          </a:fontRef>
+        </p:style>
+        <p:txBody>
+          <a:bodyPr rtlCol="0" anchor="ctr"/>
+          <a:lstStyle/>
+          <a:p>
+            <a:pPr algn="ctr"/>
+          </a:p>
+        </p:txBody>
+      </p:sp>
+      <p:sp>
+        <p:nvSpPr>
+          <p:cNvPr id="10" name="Rectangle 9"/>
+          <p:cNvSpPr/>
+          <p:nvPr/>
+        </p:nvSpPr>
+        <p:spPr>
+          <a:xfrm>
+            <a:off x="0" y="6812280"/>
+            <a:ext cx="5378823" cy="45720"/>
+          </a:xfrm>
+          <a:prstGeom prst="rect">
+            <a:avLst/>
+          </a:prstGeom>
+          <a:solidFill>
+            <a:srgbClr val="3B82F6"/>
+          </a:solidFill>
+          <a:ln>
+            <a:noFill/>
+          </a:ln>
+        </p:spPr>
+        <p:style>
+          <a:lnRef idx="1">
+            <a:schemeClr val="accent1"/>
+          </a:lnRef>
+          <a:fillRef idx="3">
+            <a:schemeClr val="accent1"/>
+          </a:fillRef>
+          <a:effectRef idx="2">
+            <a:schemeClr val="accent1"/>
+          </a:effectRef>
+          <a:fontRef idx="minor">
+            <a:schemeClr val="lt1"/>
+          </a:fontRef>
+        </p:style>
+        <p:txBody>
+          <a:bodyPr rtlCol="0" anchor="ctr"/>
+          <a:lstStyle/>
+          <a:p>
+            <a:pPr algn="ctr"/>
           </a:p>
         </p:txBody>
       </p:sp>
@@ -3468,6 +3922,9 @@
 
 <file path=ppt/slides/slide11.xml><?xml version="1.0" encoding="utf-8"?>
 <p:sld xmlns:a="http://schemas.openxmlformats.org/drawingml/2006/main" xmlns:p="http://schemas.openxmlformats.org/presentationml/2006/main" xmlns:r="http://schemas.openxmlformats.org/officeDocument/2006/relationships">
+  <p:transition>
+    <p:push dir="l"/>
+  </p:transition>
   <p:cSld>
     <p:bg>
       <p:bgPr>
@@ -3531,7 +3988,7 @@
               </a:defRPr>
             </a:pPr>
             <a:r>
-              <a:t>Perspectives &amp; évolutions</a:t>
+              <a:t>Interface utilisateur</a:t>
             </a:r>
           </a:p>
         </p:txBody>
@@ -3569,7 +4026,7 @@
               </a:defRPr>
             </a:pPr>
             <a:r>
-              <a:t>Intégration au site officiel SUP'PTIC et portail étudiant.</a:t>
+              <a:t>Design inspiré de ChatGPT — fil de discussion centré, épuré.</a:t>
             </a:r>
           </a:p>
           <a:p>
@@ -3584,7 +4041,7 @@
               </a:defRPr>
             </a:pPr>
             <a:r>
-              <a:t>Publication APK sur le Play Store (distribution officielle).</a:t>
+              <a:t>Palette institutionnelle SUP'PTIC : bleu #1A4594, fond #070F1F.</a:t>
             </a:r>
           </a:p>
           <a:p>
@@ -3599,7 +4056,7 @@
               </a:defRPr>
             </a:pPr>
             <a:r>
-              <a:t>Tableau de bord admin pour gérer les FAQ sans ligne de commande.</a:t>
+              <a:t>Messages utilisateur en pastille bleue · réponses assistant en texte libre.</a:t>
             </a:r>
           </a:p>
           <a:p>
@@ -3614,7 +4071,7 @@
               </a:defRPr>
             </a:pPr>
             <a:r>
-              <a:t>Multilingue (français / anglais) pour les partenariats internationaux.</a:t>
+              <a:t>Composer type « prompt box » · suggestions en pills cliquables.</a:t>
             </a:r>
           </a:p>
           <a:p>
@@ -3629,7 +4086,7 @@
               </a:defRPr>
             </a:pPr>
             <a:r>
-              <a:t>Analyse des questions sans réponse pour enrichir la base.</a:t>
+              <a:t>Indicateur de statut serveur (en ligne / dégradé / hors ligne).</a:t>
             </a:r>
           </a:p>
           <a:p>
@@ -3644,8 +4101,153 @@
               </a:defRPr>
             </a:pPr>
             <a:r>
-              <a:t>Renforcement sécurité &amp; conformité (RGPD, logs d'audit).</a:t>
-            </a:r>
+              <a:t>Expérience identique sur navigateur, PWA installée et APK Android.</a:t>
+            </a:r>
+          </a:p>
+        </p:txBody>
+      </p:sp>
+      <p:pic>
+        <p:nvPicPr>
+          <p:cNvPr id="4" name="Picture 3" descr="icone.png"/>
+          <p:cNvPicPr>
+            <a:picLocks noChangeAspect="1"/>
+          </p:cNvPicPr>
+          <p:nvPr/>
+        </p:nvPicPr>
+        <p:blipFill>
+          <a:blip r:embed="rId2"/>
+          <a:stretch>
+            <a:fillRect/>
+          </a:stretch>
+        </p:blipFill>
+        <p:spPr>
+          <a:xfrm>
+            <a:off x="8412480" y="6126480"/>
+            <a:ext cx="548640" cy="548640"/>
+          </a:xfrm>
+          <a:prstGeom prst="rect">
+            <a:avLst/>
+          </a:prstGeom>
+        </p:spPr>
+      </p:pic>
+      <p:sp>
+        <p:nvSpPr>
+          <p:cNvPr id="5" name="TextBox 4"/>
+          <p:cNvSpPr txBox="1"/>
+          <p:nvPr/>
+        </p:nvSpPr>
+        <p:spPr>
+          <a:xfrm>
+            <a:off x="0" y="6492240"/>
+            <a:ext cx="9144000" cy="274320"/>
+          </a:xfrm>
+          <a:prstGeom prst="rect">
+            <a:avLst/>
+          </a:prstGeom>
+          <a:noFill/>
+        </p:spPr>
+        <p:txBody>
+          <a:bodyPr wrap="none">
+            <a:spAutoFit/>
+          </a:bodyPr>
+          <a:lstStyle/>
+          <a:p>
+            <a:pPr algn="ctr">
+              <a:defRPr sz="900">
+                <a:solidFill>
+                  <a:srgbClr val="64748B"/>
+                </a:solidFill>
+              </a:defRPr>
+            </a:pPr>
+            <a:r>
+              <a:t>SUP'ONE AI — Page 11 / 17</a:t>
+            </a:r>
+          </a:p>
+        </p:txBody>
+      </p:sp>
+      <p:sp>
+        <p:nvSpPr>
+          <p:cNvPr id="6" name="Rectangle 5"/>
+          <p:cNvSpPr/>
+          <p:nvPr/>
+        </p:nvSpPr>
+        <p:spPr>
+          <a:xfrm>
+            <a:off x="0" y="6812280"/>
+            <a:ext cx="9144000" cy="45720"/>
+          </a:xfrm>
+          <a:prstGeom prst="rect">
+            <a:avLst/>
+          </a:prstGeom>
+          <a:solidFill>
+            <a:srgbClr val="E2E8F0"/>
+          </a:solidFill>
+          <a:ln>
+            <a:noFill/>
+          </a:ln>
+        </p:spPr>
+        <p:style>
+          <a:lnRef idx="1">
+            <a:schemeClr val="accent1"/>
+          </a:lnRef>
+          <a:fillRef idx="3">
+            <a:schemeClr val="accent1"/>
+          </a:fillRef>
+          <a:effectRef idx="2">
+            <a:schemeClr val="accent1"/>
+          </a:effectRef>
+          <a:fontRef idx="minor">
+            <a:schemeClr val="lt1"/>
+          </a:fontRef>
+        </p:style>
+        <p:txBody>
+          <a:bodyPr rtlCol="0" anchor="ctr"/>
+          <a:lstStyle/>
+          <a:p>
+            <a:pPr algn="ctr"/>
+          </a:p>
+        </p:txBody>
+      </p:sp>
+      <p:sp>
+        <p:nvSpPr>
+          <p:cNvPr id="7" name="Rectangle 6"/>
+          <p:cNvSpPr/>
+          <p:nvPr/>
+        </p:nvSpPr>
+        <p:spPr>
+          <a:xfrm>
+            <a:off x="0" y="6812280"/>
+            <a:ext cx="5916705" cy="45720"/>
+          </a:xfrm>
+          <a:prstGeom prst="rect">
+            <a:avLst/>
+          </a:prstGeom>
+          <a:solidFill>
+            <a:srgbClr val="3B82F6"/>
+          </a:solidFill>
+          <a:ln>
+            <a:noFill/>
+          </a:ln>
+        </p:spPr>
+        <p:style>
+          <a:lnRef idx="1">
+            <a:schemeClr val="accent1"/>
+          </a:lnRef>
+          <a:fillRef idx="3">
+            <a:schemeClr val="accent1"/>
+          </a:fillRef>
+          <a:effectRef idx="2">
+            <a:schemeClr val="accent1"/>
+          </a:effectRef>
+          <a:fontRef idx="minor">
+            <a:schemeClr val="lt1"/>
+          </a:fontRef>
+        </p:style>
+        <p:txBody>
+          <a:bodyPr rtlCol="0" anchor="ctr"/>
+          <a:lstStyle/>
+          <a:p>
+            <a:pPr algn="ctr"/>
           </a:p>
         </p:txBody>
       </p:sp>
@@ -3659,6 +4261,9 @@
 
 <file path=ppt/slides/slide12.xml><?xml version="1.0" encoding="utf-8"?>
 <p:sld xmlns:a="http://schemas.openxmlformats.org/drawingml/2006/main" xmlns:p="http://schemas.openxmlformats.org/presentationml/2006/main" xmlns:r="http://schemas.openxmlformats.org/officeDocument/2006/relationships">
+  <p:transition>
+    <p:push dir="t"/>
+  </p:transition>
   <p:cSld>
     <p:bg>
       <p:bgPr>
@@ -3683,8 +4288,8 @@
         </p:nvSpPr>
         <p:spPr>
           <a:xfrm>
-            <a:off x="548640" y="2011680"/>
-            <a:ext cx="8046720" cy="1097280"/>
+            <a:off x="457200" y="2926080"/>
+            <a:ext cx="8229600" cy="1005840"/>
           </a:xfrm>
           <a:prstGeom prst="rect">
             <a:avLst/>
@@ -3705,21 +4310,45 @@
               </a:defRPr>
             </a:pPr>
             <a:r>
-              <a:t>Merci pour votre attention</a:t>
-            </a:r>
-          </a:p>
-        </p:txBody>
-      </p:sp>
-      <p:sp>
-        <p:nvSpPr>
-          <p:cNvPr id="3" name="TextBox 2"/>
+              <a:t>IV. Mise en œuvre &amp; Sécurité</a:t>
+            </a:r>
+          </a:p>
+        </p:txBody>
+      </p:sp>
+      <p:pic>
+        <p:nvPicPr>
+          <p:cNvPr id="3" name="Picture 2" descr="icone.png"/>
+          <p:cNvPicPr>
+            <a:picLocks noChangeAspect="1"/>
+          </p:cNvPicPr>
+          <p:nvPr/>
+        </p:nvPicPr>
+        <p:blipFill>
+          <a:blip r:embed="rId2"/>
+          <a:stretch>
+            <a:fillRect/>
+          </a:stretch>
+        </p:blipFill>
+        <p:spPr>
+          <a:xfrm>
+            <a:off x="8412480" y="6126480"/>
+            <a:ext cx="548640" cy="548640"/>
+          </a:xfrm>
+          <a:prstGeom prst="rect">
+            <a:avLst/>
+          </a:prstGeom>
+        </p:spPr>
+      </p:pic>
+      <p:sp>
+        <p:nvSpPr>
+          <p:cNvPr id="4" name="TextBox 3"/>
           <p:cNvSpPr txBox="1"/>
           <p:nvPr/>
         </p:nvSpPr>
         <p:spPr>
           <a:xfrm>
-            <a:off x="548640" y="3200400"/>
-            <a:ext cx="8046720" cy="1371600"/>
+            <a:off x="0" y="6492240"/>
+            <a:ext cx="9144000" cy="274320"/>
           </a:xfrm>
           <a:prstGeom prst="rect">
             <a:avLst/>
@@ -3733,48 +4362,101 @@
           <a:lstStyle/>
           <a:p>
             <a:pPr algn="ctr">
-              <a:defRPr sz="1600">
-                <a:solidFill>
-                  <a:srgbClr val="FFFFFF"/>
-                </a:solidFill>
-              </a:defRPr>
-            </a:pPr>
-            <a:r>
-              <a:t>Club Informatique SUP'PTIC</a:t>
-            </a:r>
-          </a:p>
-          <a:p>
-            <a:pPr algn="ctr">
-              <a:defRPr sz="1600">
-                <a:solidFill>
-                  <a:srgbClr val="FFFFFF"/>
-                </a:solidFill>
-              </a:defRPr>
-            </a:pPr>
-            <a:r>
-              <a:t>SUP'ONE AI — Assistant FAQ intelligent</a:t>
-            </a:r>
-          </a:p>
-          <a:p>
-            <a:pPr algn="ctr">
-              <a:defRPr sz="1600">
-                <a:solidFill>
-                  <a:srgbClr val="FFFFFF"/>
-                </a:solidFill>
-              </a:defRPr>
-            </a:pPr>
-          </a:p>
-          <a:p>
-            <a:pPr algn="ctr">
-              <a:defRPr sz="1600">
-                <a:solidFill>
-                  <a:srgbClr val="FFFFFF"/>
-                </a:solidFill>
-              </a:defRPr>
-            </a:pPr>
-            <a:r>
-              <a:t>Documentation : docs/GUIDE_COMPLET.md · docs/DOCKER.md · docs/MOBILE.md</a:t>
-            </a:r>
+              <a:defRPr sz="900">
+                <a:solidFill>
+                  <a:srgbClr val="64748B"/>
+                </a:solidFill>
+              </a:defRPr>
+            </a:pPr>
+            <a:r>
+              <a:t>SUP'ONE AI — Page 12 / 17</a:t>
+            </a:r>
+          </a:p>
+        </p:txBody>
+      </p:sp>
+      <p:sp>
+        <p:nvSpPr>
+          <p:cNvPr id="5" name="Rectangle 4"/>
+          <p:cNvSpPr/>
+          <p:nvPr/>
+        </p:nvSpPr>
+        <p:spPr>
+          <a:xfrm>
+            <a:off x="0" y="6812280"/>
+            <a:ext cx="9144000" cy="45720"/>
+          </a:xfrm>
+          <a:prstGeom prst="rect">
+            <a:avLst/>
+          </a:prstGeom>
+          <a:solidFill>
+            <a:srgbClr val="E2E8F0"/>
+          </a:solidFill>
+          <a:ln>
+            <a:noFill/>
+          </a:ln>
+        </p:spPr>
+        <p:style>
+          <a:lnRef idx="1">
+            <a:schemeClr val="accent1"/>
+          </a:lnRef>
+          <a:fillRef idx="3">
+            <a:schemeClr val="accent1"/>
+          </a:fillRef>
+          <a:effectRef idx="2">
+            <a:schemeClr val="accent1"/>
+          </a:effectRef>
+          <a:fontRef idx="minor">
+            <a:schemeClr val="lt1"/>
+          </a:fontRef>
+        </p:style>
+        <p:txBody>
+          <a:bodyPr rtlCol="0" anchor="ctr"/>
+          <a:lstStyle/>
+          <a:p>
+            <a:pPr algn="ctr"/>
+          </a:p>
+        </p:txBody>
+      </p:sp>
+      <p:sp>
+        <p:nvSpPr>
+          <p:cNvPr id="6" name="Rectangle 5"/>
+          <p:cNvSpPr/>
+          <p:nvPr/>
+        </p:nvSpPr>
+        <p:spPr>
+          <a:xfrm>
+            <a:off x="0" y="6812280"/>
+            <a:ext cx="6454588" cy="45720"/>
+          </a:xfrm>
+          <a:prstGeom prst="rect">
+            <a:avLst/>
+          </a:prstGeom>
+          <a:solidFill>
+            <a:srgbClr val="3B82F6"/>
+          </a:solidFill>
+          <a:ln>
+            <a:noFill/>
+          </a:ln>
+        </p:spPr>
+        <p:style>
+          <a:lnRef idx="1">
+            <a:schemeClr val="accent1"/>
+          </a:lnRef>
+          <a:fillRef idx="3">
+            <a:schemeClr val="accent1"/>
+          </a:fillRef>
+          <a:effectRef idx="2">
+            <a:schemeClr val="accent1"/>
+          </a:effectRef>
+          <a:fontRef idx="minor">
+            <a:schemeClr val="lt1"/>
+          </a:fontRef>
+        </p:style>
+        <p:txBody>
+          <a:bodyPr rtlCol="0" anchor="ctr"/>
+          <a:lstStyle/>
+          <a:p>
+            <a:pPr algn="ctr"/>
           </a:p>
         </p:txBody>
       </p:sp>
@@ -3786,8 +4468,11 @@
 </p:sld>
 </file>
 
-<file path=ppt/slides/slide2.xml><?xml version="1.0" encoding="utf-8"?>
+<file path=ppt/slides/slide13.xml><?xml version="1.0" encoding="utf-8"?>
 <p:sld xmlns:a="http://schemas.openxmlformats.org/drawingml/2006/main" xmlns:p="http://schemas.openxmlformats.org/presentationml/2006/main" xmlns:r="http://schemas.openxmlformats.org/officeDocument/2006/relationships">
+  <p:transition>
+    <p:push dir="l"/>
+  </p:transition>
   <p:cSld>
     <p:bg>
       <p:bgPr>
@@ -3851,7 +4536,7 @@
               </a:defRPr>
             </a:pPr>
             <a:r>
-              <a:t>Contexte &amp; enjeux</a:t>
+              <a:t>Déploiement &amp; mise en production</a:t>
             </a:r>
           </a:p>
         </p:txBody>
@@ -3864,8 +4549,8 @@
         </p:nvSpPr>
         <p:spPr>
           <a:xfrm>
-            <a:off x="548640" y="1737360"/>
-            <a:ext cx="8046720" cy="4572000"/>
+            <a:off x="457200" y="1645920"/>
+            <a:ext cx="3931920" cy="365760"/>
           </a:xfrm>
           <a:prstGeom prst="rect">
             <a:avLst/>
@@ -3873,84 +4558,397 @@
           <a:noFill/>
         </p:spPr>
         <p:txBody>
-          <a:bodyPr wrap="square">
+          <a:bodyPr wrap="none">
             <a:spAutoFit/>
           </a:bodyPr>
           <a:lstStyle/>
           <a:p>
             <a:pPr>
+              <a:defRPr sz="1600" b="1">
+                <a:solidFill>
+                  <a:srgbClr val="1A4594"/>
+                </a:solidFill>
+              </a:defRPr>
+            </a:pPr>
+            <a:r>
+              <a:t>Serveur SUP'PTIC (on-premise)</a:t>
+            </a:r>
+          </a:p>
+        </p:txBody>
+      </p:sp>
+      <p:sp>
+        <p:nvSpPr>
+          <p:cNvPr id="4" name="TextBox 3"/>
+          <p:cNvSpPr txBox="1"/>
+          <p:nvPr/>
+        </p:nvSpPr>
+        <p:spPr>
+          <a:xfrm>
+            <a:off x="457200" y="2011680"/>
+            <a:ext cx="3931920" cy="4114800"/>
+          </a:xfrm>
+          <a:prstGeom prst="rect">
+            <a:avLst/>
+          </a:prstGeom>
+          <a:noFill/>
+        </p:spPr>
+        <p:txBody>
+          <a:bodyPr wrap="none">
+            <a:spAutoFit/>
+          </a:bodyPr>
+          <a:lstStyle/>
+          <a:p>
+            <a:pPr>
               <a:spcAft>
-                <a:spcPts val="1000"/>
+                <a:spcPts val="600"/>
               </a:spcAft>
-              <a:defRPr sz="1800">
+              <a:defRPr sz="1400">
                 <a:solidFill>
                   <a:srgbClr val="070F1F"/>
                 </a:solidFill>
               </a:defRPr>
             </a:pPr>
             <a:r>
-              <a:t>SUP'PTIC accueille chaque année de nombreux étudiants, parents et visiteurs.</a:t>
+              <a:t>• Docker Compose : Postgres + API + Nginx</a:t>
             </a:r>
           </a:p>
           <a:p>
             <a:pPr>
               <a:spcAft>
-                <a:spcPts val="1000"/>
+                <a:spcPts val="600"/>
               </a:spcAft>
-              <a:defRPr sz="1800">
+              <a:defRPr sz="1400">
                 <a:solidFill>
                   <a:srgbClr val="070F1F"/>
                 </a:solidFill>
               </a:defRPr>
             </a:pPr>
             <a:r>
-              <a:t>Les mêmes questions reviennent : inscriptions, frais, filières, examens, vie étudiante…</a:t>
+              <a:t>• Volumes persistants (BDD, index FAISS)</a:t>
             </a:r>
           </a:p>
           <a:p>
             <a:pPr>
               <a:spcAft>
-                <a:spcPts val="1000"/>
+                <a:spcPts val="600"/>
               </a:spcAft>
-              <a:defRPr sz="1800">
+              <a:defRPr sz="1400">
                 <a:solidFill>
                   <a:srgbClr val="070F1F"/>
                 </a:solidFill>
               </a:defRPr>
             </a:pPr>
             <a:r>
-              <a:t>Les services administratifs et pédagogiques sont sollicités de manière répétitive.</a:t>
+              <a:t>• Bootstrap : import FAQ + indexation</a:t>
             </a:r>
           </a:p>
           <a:p>
             <a:pPr>
               <a:spcAft>
-                <a:spcPts val="1000"/>
+                <a:spcPts val="600"/>
               </a:spcAft>
-              <a:defRPr sz="1800">
+              <a:defRPr sz="1400">
                 <a:solidFill>
                   <a:srgbClr val="070F1F"/>
                 </a:solidFill>
               </a:defRPr>
             </a:pPr>
             <a:r>
-              <a:t>Besoin d'un canal d'information accessible 24h/24, fiable et multicanal.</a:t>
+              <a:t>• HTTPS via reverse proxy (Caddy / Certbot)</a:t>
             </a:r>
           </a:p>
           <a:p>
             <a:pPr>
               <a:spcAft>
-                <a:spcPts val="1000"/>
+                <a:spcPts val="600"/>
               </a:spcAft>
-              <a:defRPr sz="1800">
+              <a:defRPr sz="1400">
                 <a:solidFill>
                   <a:srgbClr val="070F1F"/>
                 </a:solidFill>
               </a:defRPr>
             </a:pPr>
             <a:r>
-              <a:t>Objectif : réduire la charge informative tout en améliorant l'expérience utilisateur.</a:t>
-            </a:r>
+              <a:t>• Doc : docs/DOCKER.md</a:t>
+            </a:r>
+          </a:p>
+        </p:txBody>
+      </p:sp>
+      <p:sp>
+        <p:nvSpPr>
+          <p:cNvPr id="5" name="TextBox 4"/>
+          <p:cNvSpPr txBox="1"/>
+          <p:nvPr/>
+        </p:nvSpPr>
+        <p:spPr>
+          <a:xfrm>
+            <a:off x="4754880" y="1645920"/>
+            <a:ext cx="3931920" cy="365760"/>
+          </a:xfrm>
+          <a:prstGeom prst="rect">
+            <a:avLst/>
+          </a:prstGeom>
+          <a:noFill/>
+        </p:spPr>
+        <p:txBody>
+          <a:bodyPr wrap="none">
+            <a:spAutoFit/>
+          </a:bodyPr>
+          <a:lstStyle/>
+          <a:p>
+            <a:pPr>
+              <a:defRPr sz="1600" b="1">
+                <a:solidFill>
+                  <a:srgbClr val="1A4594"/>
+                </a:solidFill>
+              </a:defRPr>
+            </a:pPr>
+            <a:r>
+              <a:t>Cloud (démonstration / pilote)</a:t>
+            </a:r>
+          </a:p>
+        </p:txBody>
+      </p:sp>
+      <p:sp>
+        <p:nvSpPr>
+          <p:cNvPr id="6" name="TextBox 5"/>
+          <p:cNvSpPr txBox="1"/>
+          <p:nvPr/>
+        </p:nvSpPr>
+        <p:spPr>
+          <a:xfrm>
+            <a:off x="4754880" y="2011680"/>
+            <a:ext cx="3931920" cy="4114800"/>
+          </a:xfrm>
+          <a:prstGeom prst="rect">
+            <a:avLst/>
+          </a:prstGeom>
+          <a:noFill/>
+        </p:spPr>
+        <p:txBody>
+          <a:bodyPr wrap="none">
+            <a:spAutoFit/>
+          </a:bodyPr>
+          <a:lstStyle/>
+          <a:p>
+            <a:pPr>
+              <a:spcAft>
+                <a:spcPts val="600"/>
+              </a:spcAft>
+              <a:defRPr sz="1400">
+                <a:solidFill>
+                  <a:srgbClr val="070F1F"/>
+                </a:solidFill>
+              </a:defRPr>
+            </a:pPr>
+            <a:r>
+              <a:t>• Backend : Railway + PostgreSQL</a:t>
+            </a:r>
+          </a:p>
+          <a:p>
+            <a:pPr>
+              <a:spcAft>
+                <a:spcPts val="600"/>
+              </a:spcAft>
+              <a:defRPr sz="1400">
+                <a:solidFill>
+                  <a:srgbClr val="070F1F"/>
+                </a:solidFill>
+              </a:defRPr>
+            </a:pPr>
+            <a:r>
+              <a:t>• Frontend : Netlify ou Vercel (PWA)</a:t>
+            </a:r>
+          </a:p>
+          <a:p>
+            <a:pPr>
+              <a:spcAft>
+                <a:spcPts val="600"/>
+              </a:spcAft>
+              <a:defRPr sz="1400">
+                <a:solidFill>
+                  <a:srgbClr val="070F1F"/>
+                </a:solidFill>
+              </a:defRPr>
+            </a:pPr>
+            <a:r>
+              <a:t>• APK Android : build Capacitor local</a:t>
+            </a:r>
+          </a:p>
+          <a:p>
+            <a:pPr>
+              <a:spcAft>
+                <a:spcPts val="600"/>
+              </a:spcAft>
+              <a:defRPr sz="1400">
+                <a:solidFill>
+                  <a:srgbClr val="070F1F"/>
+                </a:solidFill>
+              </a:defRPr>
+            </a:pPr>
+            <a:r>
+              <a:t>• CI : tests Django + build React</a:t>
+            </a:r>
+          </a:p>
+          <a:p>
+            <a:pPr>
+              <a:spcAft>
+                <a:spcPts val="600"/>
+              </a:spcAft>
+              <a:defRPr sz="1400">
+                <a:solidFill>
+                  <a:srgbClr val="070F1F"/>
+                </a:solidFill>
+              </a:defRPr>
+            </a:pPr>
+            <a:r>
+              <a:t>• Doc : docs/DEPLOIEMENT.md</a:t>
+            </a:r>
+          </a:p>
+        </p:txBody>
+      </p:sp>
+      <p:pic>
+        <p:nvPicPr>
+          <p:cNvPr id="7" name="Picture 6" descr="icone.png"/>
+          <p:cNvPicPr>
+            <a:picLocks noChangeAspect="1"/>
+          </p:cNvPicPr>
+          <p:nvPr/>
+        </p:nvPicPr>
+        <p:blipFill>
+          <a:blip r:embed="rId2"/>
+          <a:stretch>
+            <a:fillRect/>
+          </a:stretch>
+        </p:blipFill>
+        <p:spPr>
+          <a:xfrm>
+            <a:off x="8412480" y="6126480"/>
+            <a:ext cx="548640" cy="548640"/>
+          </a:xfrm>
+          <a:prstGeom prst="rect">
+            <a:avLst/>
+          </a:prstGeom>
+        </p:spPr>
+      </p:pic>
+      <p:sp>
+        <p:nvSpPr>
+          <p:cNvPr id="8" name="TextBox 7"/>
+          <p:cNvSpPr txBox="1"/>
+          <p:nvPr/>
+        </p:nvSpPr>
+        <p:spPr>
+          <a:xfrm>
+            <a:off x="0" y="6492240"/>
+            <a:ext cx="9144000" cy="274320"/>
+          </a:xfrm>
+          <a:prstGeom prst="rect">
+            <a:avLst/>
+          </a:prstGeom>
+          <a:noFill/>
+        </p:spPr>
+        <p:txBody>
+          <a:bodyPr wrap="none">
+            <a:spAutoFit/>
+          </a:bodyPr>
+          <a:lstStyle/>
+          <a:p>
+            <a:pPr algn="ctr">
+              <a:defRPr sz="900">
+                <a:solidFill>
+                  <a:srgbClr val="64748B"/>
+                </a:solidFill>
+              </a:defRPr>
+            </a:pPr>
+            <a:r>
+              <a:t>SUP'ONE AI — Page 13 / 17</a:t>
+            </a:r>
+          </a:p>
+        </p:txBody>
+      </p:sp>
+      <p:sp>
+        <p:nvSpPr>
+          <p:cNvPr id="9" name="Rectangle 8"/>
+          <p:cNvSpPr/>
+          <p:nvPr/>
+        </p:nvSpPr>
+        <p:spPr>
+          <a:xfrm>
+            <a:off x="0" y="6812280"/>
+            <a:ext cx="9144000" cy="45720"/>
+          </a:xfrm>
+          <a:prstGeom prst="rect">
+            <a:avLst/>
+          </a:prstGeom>
+          <a:solidFill>
+            <a:srgbClr val="E2E8F0"/>
+          </a:solidFill>
+          <a:ln>
+            <a:noFill/>
+          </a:ln>
+        </p:spPr>
+        <p:style>
+          <a:lnRef idx="1">
+            <a:schemeClr val="accent1"/>
+          </a:lnRef>
+          <a:fillRef idx="3">
+            <a:schemeClr val="accent1"/>
+          </a:fillRef>
+          <a:effectRef idx="2">
+            <a:schemeClr val="accent1"/>
+          </a:effectRef>
+          <a:fontRef idx="minor">
+            <a:schemeClr val="lt1"/>
+          </a:fontRef>
+        </p:style>
+        <p:txBody>
+          <a:bodyPr rtlCol="0" anchor="ctr"/>
+          <a:lstStyle/>
+          <a:p>
+            <a:pPr algn="ctr"/>
+          </a:p>
+        </p:txBody>
+      </p:sp>
+      <p:sp>
+        <p:nvSpPr>
+          <p:cNvPr id="10" name="Rectangle 9"/>
+          <p:cNvSpPr/>
+          <p:nvPr/>
+        </p:nvSpPr>
+        <p:spPr>
+          <a:xfrm>
+            <a:off x="0" y="6812280"/>
+            <a:ext cx="6992470" cy="45720"/>
+          </a:xfrm>
+          <a:prstGeom prst="rect">
+            <a:avLst/>
+          </a:prstGeom>
+          <a:solidFill>
+            <a:srgbClr val="3B82F6"/>
+          </a:solidFill>
+          <a:ln>
+            <a:noFill/>
+          </a:ln>
+        </p:spPr>
+        <p:style>
+          <a:lnRef idx="1">
+            <a:schemeClr val="accent1"/>
+          </a:lnRef>
+          <a:fillRef idx="3">
+            <a:schemeClr val="accent1"/>
+          </a:fillRef>
+          <a:effectRef idx="2">
+            <a:schemeClr val="accent1"/>
+          </a:effectRef>
+          <a:fontRef idx="minor">
+            <a:schemeClr val="lt1"/>
+          </a:fontRef>
+        </p:style>
+        <p:txBody>
+          <a:bodyPr rtlCol="0" anchor="ctr"/>
+          <a:lstStyle/>
+          <a:p>
+            <a:pPr algn="ctr"/>
           </a:p>
         </p:txBody>
       </p:sp>
@@ -3962,8 +4960,11 @@
 </p:sld>
 </file>
 
-<file path=ppt/slides/slide3.xml><?xml version="1.0" encoding="utf-8"?>
+<file path=ppt/slides/slide14.xml><?xml version="1.0" encoding="utf-8"?>
 <p:sld xmlns:a="http://schemas.openxmlformats.org/drawingml/2006/main" xmlns:p="http://schemas.openxmlformats.org/presentationml/2006/main" xmlns:r="http://schemas.openxmlformats.org/officeDocument/2006/relationships">
+  <p:transition>
+    <p:push dir="l"/>
+  </p:transition>
   <p:cSld>
     <p:bg>
       <p:bgPr>
@@ -4027,7 +5028,7 @@
               </a:defRPr>
             </a:pPr>
             <a:r>
-              <a:t>La solution : SUP'ONE AI</a:t>
+              <a:t>Démonstration &amp; chiffres</a:t>
             </a:r>
           </a:p>
         </p:txBody>
@@ -4065,7 +5066,7 @@
               </a:defRPr>
             </a:pPr>
             <a:r>
-              <a:t>Chatbot conversationnel dédié à l'établissement SUP'PTIC.</a:t>
+              <a:t>Démarrage local : backend :8001 + frontend :5174</a:t>
             </a:r>
           </a:p>
           <a:p>
@@ -4080,7 +5081,7 @@
               </a:defRPr>
             </a:pPr>
             <a:r>
-              <a:t>Répond aux questions fréquentes à partir d'une base de FAQ structurée.</a:t>
+              <a:t>Base FAQ : plus de 11 000 questions/réponses indexées</a:t>
             </a:r>
           </a:p>
           <a:p>
@@ -4095,7 +5096,7 @@
               </a:defRPr>
             </a:pPr>
             <a:r>
-              <a:t>Interface moderne type ChatGPT — web, PWA installable et application Android.</a:t>
+              <a:t>Catégories : admissions, examens, filières, vie étudiante, règlements…</a:t>
             </a:r>
           </a:p>
           <a:p>
@@ -4110,7 +5111,7 @@
               </a:defRPr>
             </a:pPr>
             <a:r>
-              <a:t>Deux moteurs de réponse complémentaires : recherche classique + IA (RAG).</a:t>
+              <a:t>Tests automatisés : 22 tests Django + suite Gen3/feedback</a:t>
             </a:r>
           </a:p>
           <a:p>
@@ -4125,7 +5126,7 @@
               </a:defRPr>
             </a:pPr>
             <a:r>
-              <a:t>Système de feedback pour améliorer continuellement les réponses.</a:t>
+              <a:t>Exemples de questions : « Comment s'inscrire ? », « Quels sont les frais ? »</a:t>
             </a:r>
           </a:p>
           <a:p>
@@ -4140,8 +5141,153 @@
               </a:defRPr>
             </a:pPr>
             <a:r>
-              <a:t>Déployable sur serveur interne (Docker) ou dans le cloud (Railway + Netlify).</a:t>
-            </a:r>
+              <a:t>Endpoint santé : GET /api/health/ → status, phase1, gen3</a:t>
+            </a:r>
+          </a:p>
+        </p:txBody>
+      </p:sp>
+      <p:pic>
+        <p:nvPicPr>
+          <p:cNvPr id="4" name="Picture 3" descr="icone.png"/>
+          <p:cNvPicPr>
+            <a:picLocks noChangeAspect="1"/>
+          </p:cNvPicPr>
+          <p:nvPr/>
+        </p:nvPicPr>
+        <p:blipFill>
+          <a:blip r:embed="rId2"/>
+          <a:stretch>
+            <a:fillRect/>
+          </a:stretch>
+        </p:blipFill>
+        <p:spPr>
+          <a:xfrm>
+            <a:off x="8412480" y="6126480"/>
+            <a:ext cx="548640" cy="548640"/>
+          </a:xfrm>
+          <a:prstGeom prst="rect">
+            <a:avLst/>
+          </a:prstGeom>
+        </p:spPr>
+      </p:pic>
+      <p:sp>
+        <p:nvSpPr>
+          <p:cNvPr id="5" name="TextBox 4"/>
+          <p:cNvSpPr txBox="1"/>
+          <p:nvPr/>
+        </p:nvSpPr>
+        <p:spPr>
+          <a:xfrm>
+            <a:off x="0" y="6492240"/>
+            <a:ext cx="9144000" cy="274320"/>
+          </a:xfrm>
+          <a:prstGeom prst="rect">
+            <a:avLst/>
+          </a:prstGeom>
+          <a:noFill/>
+        </p:spPr>
+        <p:txBody>
+          <a:bodyPr wrap="none">
+            <a:spAutoFit/>
+          </a:bodyPr>
+          <a:lstStyle/>
+          <a:p>
+            <a:pPr algn="ctr">
+              <a:defRPr sz="900">
+                <a:solidFill>
+                  <a:srgbClr val="64748B"/>
+                </a:solidFill>
+              </a:defRPr>
+            </a:pPr>
+            <a:r>
+              <a:t>SUP'ONE AI — Page 14 / 17</a:t>
+            </a:r>
+          </a:p>
+        </p:txBody>
+      </p:sp>
+      <p:sp>
+        <p:nvSpPr>
+          <p:cNvPr id="6" name="Rectangle 5"/>
+          <p:cNvSpPr/>
+          <p:nvPr/>
+        </p:nvSpPr>
+        <p:spPr>
+          <a:xfrm>
+            <a:off x="0" y="6812280"/>
+            <a:ext cx="9144000" cy="45720"/>
+          </a:xfrm>
+          <a:prstGeom prst="rect">
+            <a:avLst/>
+          </a:prstGeom>
+          <a:solidFill>
+            <a:srgbClr val="E2E8F0"/>
+          </a:solidFill>
+          <a:ln>
+            <a:noFill/>
+          </a:ln>
+        </p:spPr>
+        <p:style>
+          <a:lnRef idx="1">
+            <a:schemeClr val="accent1"/>
+          </a:lnRef>
+          <a:fillRef idx="3">
+            <a:schemeClr val="accent1"/>
+          </a:fillRef>
+          <a:effectRef idx="2">
+            <a:schemeClr val="accent1"/>
+          </a:effectRef>
+          <a:fontRef idx="minor">
+            <a:schemeClr val="lt1"/>
+          </a:fontRef>
+        </p:style>
+        <p:txBody>
+          <a:bodyPr rtlCol="0" anchor="ctr"/>
+          <a:lstStyle/>
+          <a:p>
+            <a:pPr algn="ctr"/>
+          </a:p>
+        </p:txBody>
+      </p:sp>
+      <p:sp>
+        <p:nvSpPr>
+          <p:cNvPr id="7" name="Rectangle 6"/>
+          <p:cNvSpPr/>
+          <p:nvPr/>
+        </p:nvSpPr>
+        <p:spPr>
+          <a:xfrm>
+            <a:off x="0" y="6812280"/>
+            <a:ext cx="7530352" cy="45720"/>
+          </a:xfrm>
+          <a:prstGeom prst="rect">
+            <a:avLst/>
+          </a:prstGeom>
+          <a:solidFill>
+            <a:srgbClr val="3B82F6"/>
+          </a:solidFill>
+          <a:ln>
+            <a:noFill/>
+          </a:ln>
+        </p:spPr>
+        <p:style>
+          <a:lnRef idx="1">
+            <a:schemeClr val="accent1"/>
+          </a:lnRef>
+          <a:fillRef idx="3">
+            <a:schemeClr val="accent1"/>
+          </a:fillRef>
+          <a:effectRef idx="2">
+            <a:schemeClr val="accent1"/>
+          </a:effectRef>
+          <a:fontRef idx="minor">
+            <a:schemeClr val="lt1"/>
+          </a:fontRef>
+        </p:style>
+        <p:txBody>
+          <a:bodyPr rtlCol="0" anchor="ctr"/>
+          <a:lstStyle/>
+          <a:p>
+            <a:pPr algn="ctr"/>
           </a:p>
         </p:txBody>
       </p:sp>
@@ -4153,8 +5299,11 @@
 </p:sld>
 </file>
 
-<file path=ppt/slides/slide4.xml><?xml version="1.0" encoding="utf-8"?>
+<file path=ppt/slides/slide15.xml><?xml version="1.0" encoding="utf-8"?>
 <p:sld xmlns:a="http://schemas.openxmlformats.org/drawingml/2006/main" xmlns:p="http://schemas.openxmlformats.org/presentationml/2006/main" xmlns:r="http://schemas.openxmlformats.org/officeDocument/2006/relationships">
+  <p:transition>
+    <p:push dir="l"/>
+  </p:transition>
   <p:cSld>
     <p:bg>
       <p:bgPr>
@@ -4218,7 +5367,7 @@
               </a:defRPr>
             </a:pPr>
             <a:r>
-              <a:t>Fonctionnalités clés</a:t>
+              <a:t>Sécurité &amp; Protection des données (RGPD)</a:t>
             </a:r>
           </a:p>
         </p:txBody>
@@ -4231,8 +5380,145 @@
         </p:nvSpPr>
         <p:spPr>
           <a:xfrm>
-            <a:off x="457200" y="1645920"/>
-            <a:ext cx="3931920" cy="365760"/>
+            <a:off x="548640" y="1737360"/>
+            <a:ext cx="8046720" cy="4572000"/>
+          </a:xfrm>
+          <a:prstGeom prst="rect">
+            <a:avLst/>
+          </a:prstGeom>
+          <a:noFill/>
+        </p:spPr>
+        <p:txBody>
+          <a:bodyPr wrap="square">
+            <a:spAutoFit/>
+          </a:bodyPr>
+          <a:lstStyle/>
+          <a:p>
+            <a:pPr>
+              <a:spcAft>
+                <a:spcPts val="1000"/>
+              </a:spcAft>
+              <a:defRPr sz="1800">
+                <a:solidFill>
+                  <a:srgbClr val="070F1F"/>
+                </a:solidFill>
+              </a:defRPr>
+            </a:pPr>
+            <a:r>
+              <a:t>Authentification sécurisée : Gestion par jetons (Tokens) et sessions isolées.</a:t>
+            </a:r>
+          </a:p>
+          <a:p>
+            <a:pPr>
+              <a:spcAft>
+                <a:spcPts val="1000"/>
+              </a:spcAft>
+              <a:defRPr sz="1800">
+                <a:solidFill>
+                  <a:srgbClr val="070F1F"/>
+                </a:solidFill>
+              </a:defRPr>
+            </a:pPr>
+            <a:r>
+              <a:t>Chiffrement des échanges : Communications intégrales via protocole HTTPS.</a:t>
+            </a:r>
+          </a:p>
+          <a:p>
+            <a:pPr>
+              <a:spcAft>
+                <a:spcPts val="1000"/>
+              </a:spcAft>
+              <a:defRPr sz="1800">
+                <a:solidFill>
+                  <a:srgbClr val="070F1F"/>
+                </a:solidFill>
+              </a:defRPr>
+            </a:pPr>
+            <a:r>
+              <a:t>Droit à l'oubli : Fonctionnalité de suppression complète de l'historique par l'utilisateur.</a:t>
+            </a:r>
+          </a:p>
+          <a:p>
+            <a:pPr>
+              <a:spcAft>
+                <a:spcPts val="1000"/>
+              </a:spcAft>
+              <a:defRPr sz="1800">
+                <a:solidFill>
+                  <a:srgbClr val="070F1F"/>
+                </a:solidFill>
+              </a:defRPr>
+            </a:pPr>
+            <a:r>
+              <a:t>Confidentialité : Anonymisation des feedbacks et protection des données personnelles.</a:t>
+            </a:r>
+          </a:p>
+          <a:p>
+            <a:pPr>
+              <a:spcAft>
+                <a:spcPts val="1000"/>
+              </a:spcAft>
+              <a:defRPr sz="1800">
+                <a:solidFill>
+                  <a:srgbClr val="070F1F"/>
+                </a:solidFill>
+              </a:defRPr>
+            </a:pPr>
+            <a:r>
+              <a:t>Conformité RGPD : Transparence, collecte minimale et contrôle des données par l'étudiant.</a:t>
+            </a:r>
+          </a:p>
+          <a:p>
+            <a:pPr>
+              <a:spcAft>
+                <a:spcPts val="1000"/>
+              </a:spcAft>
+              <a:defRPr sz="1800">
+                <a:solidFill>
+                  <a:srgbClr val="070F1F"/>
+                </a:solidFill>
+              </a:defRPr>
+            </a:pPr>
+            <a:r>
+              <a:t>Sécurisation infrastructure : Protection de la base de données et des accès API.</a:t>
+            </a:r>
+          </a:p>
+        </p:txBody>
+      </p:sp>
+      <p:pic>
+        <p:nvPicPr>
+          <p:cNvPr id="4" name="Picture 3" descr="icone.png"/>
+          <p:cNvPicPr>
+            <a:picLocks noChangeAspect="1"/>
+          </p:cNvPicPr>
+          <p:nvPr/>
+        </p:nvPicPr>
+        <p:blipFill>
+          <a:blip r:embed="rId2"/>
+          <a:stretch>
+            <a:fillRect/>
+          </a:stretch>
+        </p:blipFill>
+        <p:spPr>
+          <a:xfrm>
+            <a:off x="8412480" y="6126480"/>
+            <a:ext cx="548640" cy="548640"/>
+          </a:xfrm>
+          <a:prstGeom prst="rect">
+            <a:avLst/>
+          </a:prstGeom>
+        </p:spPr>
+      </p:pic>
+      <p:sp>
+        <p:nvSpPr>
+          <p:cNvPr id="5" name="TextBox 4"/>
+          <p:cNvSpPr txBox="1"/>
+          <p:nvPr/>
+        </p:nvSpPr>
+        <p:spPr>
+          <a:xfrm>
+            <a:off x="0" y="6492240"/>
+            <a:ext cx="9144000" cy="274320"/>
           </a:xfrm>
           <a:prstGeom prst="rect">
             <a:avLst/>
@@ -4245,277 +5531,102 @@
           </a:bodyPr>
           <a:lstStyle/>
           <a:p>
-            <a:pPr>
-              <a:defRPr sz="1600" b="1">
-                <a:solidFill>
-                  <a:srgbClr val="1A4594"/>
-                </a:solidFill>
-              </a:defRPr>
-            </a:pPr>
-            <a:r>
-              <a:t>Pour les utilisateurs</a:t>
-            </a:r>
-          </a:p>
-        </p:txBody>
-      </p:sp>
-      <p:sp>
-        <p:nvSpPr>
-          <p:cNvPr id="4" name="TextBox 3"/>
-          <p:cNvSpPr txBox="1"/>
-          <p:nvPr/>
-        </p:nvSpPr>
-        <p:spPr>
-          <a:xfrm>
-            <a:off x="457200" y="2011680"/>
-            <a:ext cx="3931920" cy="4114800"/>
-          </a:xfrm>
-          <a:prstGeom prst="rect">
-            <a:avLst/>
-          </a:prstGeom>
-          <a:noFill/>
-        </p:spPr>
-        <p:txBody>
-          <a:bodyPr wrap="none">
-            <a:spAutoFit/>
-          </a:bodyPr>
-          <a:lstStyle/>
-          <a:p>
-            <a:pPr>
-              <a:spcAft>
-                <a:spcPts val="600"/>
-              </a:spcAft>
-              <a:defRPr sz="1400">
-                <a:solidFill>
-                  <a:srgbClr val="070F1F"/>
-                </a:solidFill>
-              </a:defRPr>
-            </a:pPr>
-            <a:r>
-              <a:t>• Chat en français, streaming des réponses</a:t>
-            </a:r>
-          </a:p>
-          <a:p>
-            <a:pPr>
-              <a:spcAft>
-                <a:spcPts val="600"/>
-              </a:spcAft>
-              <a:defRPr sz="1400">
-                <a:solidFill>
-                  <a:srgbClr val="070F1F"/>
-                </a:solidFill>
-              </a:defRPr>
-            </a:pPr>
-            <a:r>
-              <a:t>• Suggestions de questions au démarrage</a:t>
-            </a:r>
-          </a:p>
-          <a:p>
-            <a:pPr>
-              <a:spcAft>
-                <a:spcPts val="600"/>
-              </a:spcAft>
-              <a:defRPr sz="1400">
-                <a:solidFill>
-                  <a:srgbClr val="070F1F"/>
-                </a:solidFill>
-              </a:defRPr>
-            </a:pPr>
-            <a:r>
-              <a:t>• Thème clair / sombre</a:t>
-            </a:r>
-          </a:p>
-          <a:p>
-            <a:pPr>
-              <a:spcAft>
-                <a:spcPts val="600"/>
-              </a:spcAft>
-              <a:defRPr sz="1400">
-                <a:solidFill>
-                  <a:srgbClr val="070F1F"/>
-                </a:solidFill>
-              </a:defRPr>
-            </a:pPr>
-            <a:r>
-              <a:t>• Installation PWA (mobile &amp; bureau)</a:t>
-            </a:r>
-          </a:p>
-          <a:p>
-            <a:pPr>
-              <a:spcAft>
-                <a:spcPts val="600"/>
-              </a:spcAft>
-              <a:defRPr sz="1400">
-                <a:solidFill>
-                  <a:srgbClr val="070F1F"/>
-                </a:solidFill>
-              </a:defRPr>
-            </a:pPr>
-            <a:r>
-              <a:t>• Application Android (APK)</a:t>
-            </a:r>
-          </a:p>
-          <a:p>
-            <a:pPr>
-              <a:spcAft>
-                <a:spcPts val="600"/>
-              </a:spcAft>
-              <a:defRPr sz="1400">
-                <a:solidFill>
-                  <a:srgbClr val="070F1F"/>
-                </a:solidFill>
-              </a:defRPr>
-            </a:pPr>
-            <a:r>
-              <a:t>• Like / dislike + commentaire</a:t>
-            </a:r>
-          </a:p>
-        </p:txBody>
-      </p:sp>
-      <p:sp>
-        <p:nvSpPr>
-          <p:cNvPr id="5" name="TextBox 4"/>
-          <p:cNvSpPr txBox="1"/>
-          <p:nvPr/>
-        </p:nvSpPr>
-        <p:spPr>
-          <a:xfrm>
-            <a:off x="4754880" y="1645920"/>
-            <a:ext cx="3931920" cy="365760"/>
-          </a:xfrm>
-          <a:prstGeom prst="rect">
-            <a:avLst/>
-          </a:prstGeom>
-          <a:noFill/>
-        </p:spPr>
-        <p:txBody>
-          <a:bodyPr wrap="none">
-            <a:spAutoFit/>
-          </a:bodyPr>
-          <a:lstStyle/>
-          <a:p>
-            <a:pPr>
-              <a:defRPr sz="1600" b="1">
-                <a:solidFill>
-                  <a:srgbClr val="1A4594"/>
-                </a:solidFill>
-              </a:defRPr>
-            </a:pPr>
-            <a:r>
-              <a:t>Pour l'administration</a:t>
-            </a:r>
-          </a:p>
-        </p:txBody>
-      </p:sp>
-      <p:sp>
-        <p:nvSpPr>
-          <p:cNvPr id="6" name="TextBox 5"/>
-          <p:cNvSpPr txBox="1"/>
-          <p:nvPr/>
-        </p:nvSpPr>
-        <p:spPr>
-          <a:xfrm>
-            <a:off x="4754880" y="2011680"/>
-            <a:ext cx="3931920" cy="4114800"/>
-          </a:xfrm>
-          <a:prstGeom prst="rect">
-            <a:avLst/>
-          </a:prstGeom>
-          <a:noFill/>
-        </p:spPr>
-        <p:txBody>
-          <a:bodyPr wrap="none">
-            <a:spAutoFit/>
-          </a:bodyPr>
-          <a:lstStyle/>
-          <a:p>
-            <a:pPr>
-              <a:spcAft>
-                <a:spcPts val="600"/>
-              </a:spcAft>
-              <a:defRPr sz="1400">
-                <a:solidFill>
-                  <a:srgbClr val="070F1F"/>
-                </a:solidFill>
-              </a:defRPr>
-            </a:pPr>
-            <a:r>
-              <a:t>• Base FAQ catégorisée (~11 000 entrées)</a:t>
-            </a:r>
-          </a:p>
-          <a:p>
-            <a:pPr>
-              <a:spcAft>
-                <a:spcPts val="600"/>
-              </a:spcAft>
-              <a:defRPr sz="1400">
-                <a:solidFill>
-                  <a:srgbClr val="070F1F"/>
-                </a:solidFill>
-              </a:defRPr>
-            </a:pPr>
-            <a:r>
-              <a:t>• API REST documentée</a:t>
-            </a:r>
-          </a:p>
-          <a:p>
-            <a:pPr>
-              <a:spcAft>
-                <a:spcPts val="600"/>
-              </a:spcAft>
-              <a:defRPr sz="1400">
-                <a:solidFill>
-                  <a:srgbClr val="070F1F"/>
-                </a:solidFill>
-              </a:defRPr>
-            </a:pPr>
-            <a:r>
-              <a:t>• Statistiques de satisfaction</a:t>
-            </a:r>
-          </a:p>
-          <a:p>
-            <a:pPr>
-              <a:spcAft>
-                <a:spcPts val="600"/>
-              </a:spcAft>
-              <a:defRPr sz="1400">
-                <a:solidFill>
-                  <a:srgbClr val="070F1F"/>
-                </a:solidFill>
-              </a:defRPr>
-            </a:pPr>
-            <a:r>
-              <a:t>• Indexation automatique TF-IDF + FAISS</a:t>
-            </a:r>
-          </a:p>
-          <a:p>
-            <a:pPr>
-              <a:spcAft>
-                <a:spcPts val="600"/>
-              </a:spcAft>
-              <a:defRPr sz="1400">
-                <a:solidFill>
-                  <a:srgbClr val="070F1F"/>
-                </a:solidFill>
-              </a:defRPr>
-            </a:pPr>
-            <a:r>
-              <a:t>• Pipeline RAG avec Gemini (optionnel)</a:t>
-            </a:r>
-          </a:p>
-          <a:p>
-            <a:pPr>
-              <a:spcAft>
-                <a:spcPts val="600"/>
-              </a:spcAft>
-              <a:defRPr sz="1400">
-                <a:solidFill>
-                  <a:srgbClr val="070F1F"/>
-                </a:solidFill>
-              </a:defRPr>
-            </a:pPr>
-            <a:r>
-              <a:t>• Déploiement Docker, Railway ou VPS</a:t>
-            </a:r>
+            <a:pPr algn="ctr">
+              <a:defRPr sz="900">
+                <a:solidFill>
+                  <a:srgbClr val="64748B"/>
+                </a:solidFill>
+              </a:defRPr>
+            </a:pPr>
+            <a:r>
+              <a:t>SUP'ONE AI — Page 15 / 17</a:t>
+            </a:r>
+          </a:p>
+        </p:txBody>
+      </p:sp>
+      <p:sp>
+        <p:nvSpPr>
+          <p:cNvPr id="6" name="Rectangle 5"/>
+          <p:cNvSpPr/>
+          <p:nvPr/>
+        </p:nvSpPr>
+        <p:spPr>
+          <a:xfrm>
+            <a:off x="0" y="6812280"/>
+            <a:ext cx="9144000" cy="45720"/>
+          </a:xfrm>
+          <a:prstGeom prst="rect">
+            <a:avLst/>
+          </a:prstGeom>
+          <a:solidFill>
+            <a:srgbClr val="E2E8F0"/>
+          </a:solidFill>
+          <a:ln>
+            <a:noFill/>
+          </a:ln>
+        </p:spPr>
+        <p:style>
+          <a:lnRef idx="1">
+            <a:schemeClr val="accent1"/>
+          </a:lnRef>
+          <a:fillRef idx="3">
+            <a:schemeClr val="accent1"/>
+          </a:fillRef>
+          <a:effectRef idx="2">
+            <a:schemeClr val="accent1"/>
+          </a:effectRef>
+          <a:fontRef idx="minor">
+            <a:schemeClr val="lt1"/>
+          </a:fontRef>
+        </p:style>
+        <p:txBody>
+          <a:bodyPr rtlCol="0" anchor="ctr"/>
+          <a:lstStyle/>
+          <a:p>
+            <a:pPr algn="ctr"/>
+          </a:p>
+        </p:txBody>
+      </p:sp>
+      <p:sp>
+        <p:nvSpPr>
+          <p:cNvPr id="7" name="Rectangle 6"/>
+          <p:cNvSpPr/>
+          <p:nvPr/>
+        </p:nvSpPr>
+        <p:spPr>
+          <a:xfrm>
+            <a:off x="0" y="6812280"/>
+            <a:ext cx="8068235" cy="45720"/>
+          </a:xfrm>
+          <a:prstGeom prst="rect">
+            <a:avLst/>
+          </a:prstGeom>
+          <a:solidFill>
+            <a:srgbClr val="3B82F6"/>
+          </a:solidFill>
+          <a:ln>
+            <a:noFill/>
+          </a:ln>
+        </p:spPr>
+        <p:style>
+          <a:lnRef idx="1">
+            <a:schemeClr val="accent1"/>
+          </a:lnRef>
+          <a:fillRef idx="3">
+            <a:schemeClr val="accent1"/>
+          </a:fillRef>
+          <a:effectRef idx="2">
+            <a:schemeClr val="accent1"/>
+          </a:effectRef>
+          <a:fontRef idx="minor">
+            <a:schemeClr val="lt1"/>
+          </a:fontRef>
+        </p:style>
+        <p:txBody>
+          <a:bodyPr rtlCol="0" anchor="ctr"/>
+          <a:lstStyle/>
+          <a:p>
+            <a:pPr algn="ctr"/>
           </a:p>
         </p:txBody>
       </p:sp>
@@ -4527,8 +5638,11 @@
 </p:sld>
 </file>
 
-<file path=ppt/slides/slide5.xml><?xml version="1.0" encoding="utf-8"?>
+<file path=ppt/slides/slide16.xml><?xml version="1.0" encoding="utf-8"?>
 <p:sld xmlns:a="http://schemas.openxmlformats.org/drawingml/2006/main" xmlns:p="http://schemas.openxmlformats.org/presentationml/2006/main" xmlns:r="http://schemas.openxmlformats.org/officeDocument/2006/relationships">
+  <p:transition>
+    <p:push dir="t"/>
+  </p:transition>
   <p:cSld>
     <p:bg>
       <p:bgPr>
@@ -4592,7 +5706,7 @@
               </a:defRPr>
             </a:pPr>
             <a:r>
-              <a:t>Architecture globale</a:t>
+              <a:t>Perspectives &amp; évolutions</a:t>
             </a:r>
           </a:p>
         </p:txBody>
@@ -4605,8 +5719,145 @@
         </p:nvSpPr>
         <p:spPr>
           <a:xfrm>
-            <a:off x="457200" y="1143000"/>
-            <a:ext cx="8229600" cy="457200"/>
+            <a:off x="548640" y="1737360"/>
+            <a:ext cx="8046720" cy="4572000"/>
+          </a:xfrm>
+          <a:prstGeom prst="rect">
+            <a:avLst/>
+          </a:prstGeom>
+          <a:noFill/>
+        </p:spPr>
+        <p:txBody>
+          <a:bodyPr wrap="square">
+            <a:spAutoFit/>
+          </a:bodyPr>
+          <a:lstStyle/>
+          <a:p>
+            <a:pPr>
+              <a:spcAft>
+                <a:spcPts val="1000"/>
+              </a:spcAft>
+              <a:defRPr sz="1800">
+                <a:solidFill>
+                  <a:srgbClr val="070F1F"/>
+                </a:solidFill>
+              </a:defRPr>
+            </a:pPr>
+            <a:r>
+              <a:t>Intégration au site officiel SUP'PTIC et portail étudiant.</a:t>
+            </a:r>
+          </a:p>
+          <a:p>
+            <a:pPr>
+              <a:spcAft>
+                <a:spcPts val="1000"/>
+              </a:spcAft>
+              <a:defRPr sz="1800">
+                <a:solidFill>
+                  <a:srgbClr val="070F1F"/>
+                </a:solidFill>
+              </a:defRPr>
+            </a:pPr>
+            <a:r>
+              <a:t>Publication APK sur le Play Store (distribution officielle).</a:t>
+            </a:r>
+          </a:p>
+          <a:p>
+            <a:pPr>
+              <a:spcAft>
+                <a:spcPts val="1000"/>
+              </a:spcAft>
+              <a:defRPr sz="1800">
+                <a:solidFill>
+                  <a:srgbClr val="070F1F"/>
+                </a:solidFill>
+              </a:defRPr>
+            </a:pPr>
+            <a:r>
+              <a:t>Tableau de bord admin pour gérer les FAQ sans ligne de commande.</a:t>
+            </a:r>
+          </a:p>
+          <a:p>
+            <a:pPr>
+              <a:spcAft>
+                <a:spcPts val="1000"/>
+              </a:spcAft>
+              <a:defRPr sz="1800">
+                <a:solidFill>
+                  <a:srgbClr val="070F1F"/>
+                </a:solidFill>
+              </a:defRPr>
+            </a:pPr>
+            <a:r>
+              <a:t>Multilingue (français / anglais) pour les partenariats internationaux.</a:t>
+            </a:r>
+          </a:p>
+          <a:p>
+            <a:pPr>
+              <a:spcAft>
+                <a:spcPts val="1000"/>
+              </a:spcAft>
+              <a:defRPr sz="1800">
+                <a:solidFill>
+                  <a:srgbClr val="070F1F"/>
+                </a:solidFill>
+              </a:defRPr>
+            </a:pPr>
+            <a:r>
+              <a:t>Analyse des questions sans réponse pour enrichir la base.</a:t>
+            </a:r>
+          </a:p>
+          <a:p>
+            <a:pPr>
+              <a:spcAft>
+                <a:spcPts val="1000"/>
+              </a:spcAft>
+              <a:defRPr sz="1800">
+                <a:solidFill>
+                  <a:srgbClr val="070F1F"/>
+                </a:solidFill>
+              </a:defRPr>
+            </a:pPr>
+            <a:r>
+              <a:t>Renforcement sécurité &amp; conformité (RGPD, logs d'audit).</a:t>
+            </a:r>
+          </a:p>
+        </p:txBody>
+      </p:sp>
+      <p:pic>
+        <p:nvPicPr>
+          <p:cNvPr id="4" name="Picture 3" descr="icone.png"/>
+          <p:cNvPicPr>
+            <a:picLocks noChangeAspect="1"/>
+          </p:cNvPicPr>
+          <p:nvPr/>
+        </p:nvPicPr>
+        <p:blipFill>
+          <a:blip r:embed="rId2"/>
+          <a:stretch>
+            <a:fillRect/>
+          </a:stretch>
+        </p:blipFill>
+        <p:spPr>
+          <a:xfrm>
+            <a:off x="8412480" y="6126480"/>
+            <a:ext cx="548640" cy="548640"/>
+          </a:xfrm>
+          <a:prstGeom prst="rect">
+            <a:avLst/>
+          </a:prstGeom>
+        </p:spPr>
+      </p:pic>
+      <p:sp>
+        <p:nvSpPr>
+          <p:cNvPr id="5" name="TextBox 4"/>
+          <p:cNvSpPr txBox="1"/>
+          <p:nvPr/>
+        </p:nvSpPr>
+        <p:spPr>
+          <a:xfrm>
+            <a:off x="0" y="6492240"/>
+            <a:ext cx="9144000" cy="274320"/>
           </a:xfrm>
           <a:prstGeom prst="rect">
             <a:avLst/>
@@ -4619,208 +5870,102 @@
           </a:bodyPr>
           <a:lstStyle/>
           <a:p>
-            <a:pPr>
-              <a:defRPr sz="1400">
+            <a:pPr algn="ctr">
+              <a:defRPr sz="900">
                 <a:solidFill>
                   <a:srgbClr val="64748B"/>
                 </a:solidFill>
               </a:defRPr>
             </a:pPr>
             <a:r>
-              <a:t>Séparation frontend / backend / données</a:t>
-            </a:r>
-          </a:p>
-        </p:txBody>
-      </p:sp>
-      <p:sp>
-        <p:nvSpPr>
-          <p:cNvPr id="4" name="TextBox 3"/>
-          <p:cNvSpPr txBox="1"/>
-          <p:nvPr/>
-        </p:nvSpPr>
-        <p:spPr>
-          <a:xfrm>
-            <a:off x="457200" y="1554480"/>
-            <a:ext cx="8229600" cy="4389120"/>
-          </a:xfrm>
-          <a:prstGeom prst="rect">
-            <a:avLst/>
-          </a:prstGeom>
-          <a:noFill/>
-        </p:spPr>
-        <p:txBody>
-          <a:bodyPr wrap="none">
-            <a:spAutoFit/>
-          </a:bodyPr>
-          <a:lstStyle/>
-          <a:p>
-            <a:pPr>
-              <a:defRPr sz="1300">
-                <a:solidFill>
-                  <a:srgbClr val="070F1F"/>
-                </a:solidFill>
-                <a:latin typeface="Consolas"/>
-              </a:defRPr>
-            </a:pPr>
-            <a:r>
-              <a:t>┌─────────────────────────────────────────────────────────┐</a:t>
-            </a:r>
-          </a:p>
-          <a:p>
-            <a:pPr>
-              <a:defRPr sz="1300">
-                <a:solidFill>
-                  <a:srgbClr val="070F1F"/>
-                </a:solidFill>
-                <a:latin typeface="Consolas"/>
-              </a:defRPr>
-            </a:pPr>
-            <a:r>
-              <a:t>│  FRONTEND — React 19 + Vite + PWA + Capacitor (Android) │</a:t>
-            </a:r>
-          </a:p>
-          <a:p>
-            <a:pPr>
-              <a:defRPr sz="1300">
-                <a:solidFill>
-                  <a:srgbClr val="070F1F"/>
-                </a:solidFill>
-                <a:latin typeface="Consolas"/>
-              </a:defRPr>
-            </a:pPr>
-            <a:r>
-              <a:t>│  Interface ChatGPT · thèmes · feedback · suggestions    │</a:t>
-            </a:r>
-          </a:p>
-          <a:p>
-            <a:pPr>
-              <a:defRPr sz="1300">
-                <a:solidFill>
-                  <a:srgbClr val="070F1F"/>
-                </a:solidFill>
-                <a:latin typeface="Consolas"/>
-              </a:defRPr>
-            </a:pPr>
-            <a:r>
-              <a:t>└──────────────────────────┬──────────────────────────────┘</a:t>
-            </a:r>
-          </a:p>
-          <a:p>
-            <a:pPr>
-              <a:defRPr sz="1300">
-                <a:solidFill>
-                  <a:srgbClr val="070F1F"/>
-                </a:solidFill>
-                <a:latin typeface="Consolas"/>
-              </a:defRPr>
-            </a:pPr>
-            <a:r>
-              <a:t>                           │ HTTPS / REST / SSE</a:t>
-            </a:r>
-          </a:p>
-          <a:p>
-            <a:pPr>
-              <a:defRPr sz="1300">
-                <a:solidFill>
-                  <a:srgbClr val="070F1F"/>
-                </a:solidFill>
-                <a:latin typeface="Consolas"/>
-              </a:defRPr>
-            </a:pPr>
-            <a:r>
-              <a:t>┌──────────────────────────▼──────────────────────────────┐</a:t>
-            </a:r>
-          </a:p>
-          <a:p>
-            <a:pPr>
-              <a:defRPr sz="1300">
-                <a:solidFill>
-                  <a:srgbClr val="070F1F"/>
-                </a:solidFill>
-                <a:latin typeface="Consolas"/>
-              </a:defRPr>
-            </a:pPr>
-            <a:r>
-              <a:t>│  BACKEND — Django REST + Gunicorn + PostgreSQL          │</a:t>
-            </a:r>
-          </a:p>
-          <a:p>
-            <a:pPr>
-              <a:defRPr sz="1300">
-                <a:solidFill>
-                  <a:srgbClr val="070F1F"/>
-                </a:solidFill>
-                <a:latin typeface="Consolas"/>
-              </a:defRPr>
-            </a:pPr>
-            <a:r>
-              <a:t>│  Phase 1 (/api/)  ·  Gen3 RAG (/api/v2/)                │</a:t>
-            </a:r>
-          </a:p>
-          <a:p>
-            <a:pPr>
-              <a:defRPr sz="1300">
-                <a:solidFill>
-                  <a:srgbClr val="070F1F"/>
-                </a:solidFill>
-                <a:latin typeface="Consolas"/>
-              </a:defRPr>
-            </a:pPr>
-            <a:r>
-              <a:t>└──────────────────────────┬──────────────────────────────┘</a:t>
-            </a:r>
-          </a:p>
-          <a:p>
-            <a:pPr>
-              <a:defRPr sz="1300">
-                <a:solidFill>
-                  <a:srgbClr val="070F1F"/>
-                </a:solidFill>
-                <a:latin typeface="Consolas"/>
-              </a:defRPr>
-            </a:pPr>
-            <a:r>
-              <a:t>                           │</a:t>
-            </a:r>
-          </a:p>
-          <a:p>
-            <a:pPr>
-              <a:defRPr sz="1300">
-                <a:solidFill>
-                  <a:srgbClr val="070F1F"/>
-                </a:solidFill>
-                <a:latin typeface="Consolas"/>
-              </a:defRPr>
-            </a:pPr>
-            <a:r>
-              <a:t>┌──────────────────────────▼──────────────────────────────┐</a:t>
-            </a:r>
-          </a:p>
-          <a:p>
-            <a:pPr>
-              <a:defRPr sz="1300">
-                <a:solidFill>
-                  <a:srgbClr val="070F1F"/>
-                </a:solidFill>
-                <a:latin typeface="Consolas"/>
-              </a:defRPr>
-            </a:pPr>
-            <a:r>
-              <a:t>│  DONNÉES — FAQ JSON · vecteurs TF-IDF · index FAISS     │</a:t>
-            </a:r>
-          </a:p>
-          <a:p>
-            <a:pPr>
-              <a:defRPr sz="1300">
-                <a:solidFill>
-                  <a:srgbClr val="070F1F"/>
-                </a:solidFill>
-                <a:latin typeface="Consolas"/>
-              </a:defRPr>
-            </a:pPr>
-            <a:r>
-              <a:t>└─────────────────────────────────────────────────────────┘</a:t>
-            </a:r>
+              <a:t>SUP'ONE AI — Page 16 / 17</a:t>
+            </a:r>
+          </a:p>
+        </p:txBody>
+      </p:sp>
+      <p:sp>
+        <p:nvSpPr>
+          <p:cNvPr id="6" name="Rectangle 5"/>
+          <p:cNvSpPr/>
+          <p:nvPr/>
+        </p:nvSpPr>
+        <p:spPr>
+          <a:xfrm>
+            <a:off x="0" y="6812280"/>
+            <a:ext cx="9144000" cy="45720"/>
+          </a:xfrm>
+          <a:prstGeom prst="rect">
+            <a:avLst/>
+          </a:prstGeom>
+          <a:solidFill>
+            <a:srgbClr val="E2E8F0"/>
+          </a:solidFill>
+          <a:ln>
+            <a:noFill/>
+          </a:ln>
+        </p:spPr>
+        <p:style>
+          <a:lnRef idx="1">
+            <a:schemeClr val="accent1"/>
+          </a:lnRef>
+          <a:fillRef idx="3">
+            <a:schemeClr val="accent1"/>
+          </a:fillRef>
+          <a:effectRef idx="2">
+            <a:schemeClr val="accent1"/>
+          </a:effectRef>
+          <a:fontRef idx="minor">
+            <a:schemeClr val="lt1"/>
+          </a:fontRef>
+        </p:style>
+        <p:txBody>
+          <a:bodyPr rtlCol="0" anchor="ctr"/>
+          <a:lstStyle/>
+          <a:p>
+            <a:pPr algn="ctr"/>
+          </a:p>
+        </p:txBody>
+      </p:sp>
+      <p:sp>
+        <p:nvSpPr>
+          <p:cNvPr id="7" name="Rectangle 6"/>
+          <p:cNvSpPr/>
+          <p:nvPr/>
+        </p:nvSpPr>
+        <p:spPr>
+          <a:xfrm>
+            <a:off x="0" y="6812280"/>
+            <a:ext cx="8606117" cy="45720"/>
+          </a:xfrm>
+          <a:prstGeom prst="rect">
+            <a:avLst/>
+          </a:prstGeom>
+          <a:solidFill>
+            <a:srgbClr val="3B82F6"/>
+          </a:solidFill>
+          <a:ln>
+            <a:noFill/>
+          </a:ln>
+        </p:spPr>
+        <p:style>
+          <a:lnRef idx="1">
+            <a:schemeClr val="accent1"/>
+          </a:lnRef>
+          <a:fillRef idx="3">
+            <a:schemeClr val="accent1"/>
+          </a:fillRef>
+          <a:effectRef idx="2">
+            <a:schemeClr val="accent1"/>
+          </a:effectRef>
+          <a:fontRef idx="minor">
+            <a:schemeClr val="lt1"/>
+          </a:fontRef>
+        </p:style>
+        <p:txBody>
+          <a:bodyPr rtlCol="0" anchor="ctr"/>
+          <a:lstStyle/>
+          <a:p>
+            <a:pPr algn="ctr"/>
           </a:p>
         </p:txBody>
       </p:sp>
@@ -4832,8 +5977,497 @@
 </p:sld>
 </file>
 
-<file path=ppt/slides/slide6.xml><?xml version="1.0" encoding="utf-8"?>
+<file path=ppt/slides/slide17.xml><?xml version="1.0" encoding="utf-8"?>
 <p:sld xmlns:a="http://schemas.openxmlformats.org/drawingml/2006/main" xmlns:p="http://schemas.openxmlformats.org/presentationml/2006/main" xmlns:r="http://schemas.openxmlformats.org/officeDocument/2006/relationships">
+  <p:transition>
+    <p:push dir="l"/>
+  </p:transition>
+  <p:cSld>
+    <p:bg>
+      <p:bgPr>
+        <a:solidFill>
+          <a:srgbClr val="1A4594"/>
+        </a:solidFill>
+        <a:effectLst/>
+      </p:bgPr>
+    </p:bg>
+    <p:spTree>
+      <p:nvGrpSpPr>
+        <p:cNvPr id="1" name=""/>
+        <p:cNvGrpSpPr/>
+        <p:nvPr/>
+      </p:nvGrpSpPr>
+      <p:grpSpPr/>
+      <p:sp>
+        <p:nvSpPr>
+          <p:cNvPr id="2" name="TextBox 1"/>
+          <p:cNvSpPr txBox="1"/>
+          <p:nvPr/>
+        </p:nvSpPr>
+        <p:spPr>
+          <a:xfrm>
+            <a:off x="548640" y="2011680"/>
+            <a:ext cx="8046720" cy="1097280"/>
+          </a:xfrm>
+          <a:prstGeom prst="rect">
+            <a:avLst/>
+          </a:prstGeom>
+          <a:noFill/>
+        </p:spPr>
+        <p:txBody>
+          <a:bodyPr wrap="none">
+            <a:spAutoFit/>
+          </a:bodyPr>
+          <a:lstStyle/>
+          <a:p>
+            <a:pPr algn="ctr">
+              <a:defRPr sz="4000" b="1">
+                <a:solidFill>
+                  <a:srgbClr val="FFFFFF"/>
+                </a:solidFill>
+              </a:defRPr>
+            </a:pPr>
+            <a:r>
+              <a:t>Merci pour votre attention</a:t>
+            </a:r>
+          </a:p>
+        </p:txBody>
+      </p:sp>
+      <p:sp>
+        <p:nvSpPr>
+          <p:cNvPr id="3" name="TextBox 2"/>
+          <p:cNvSpPr txBox="1"/>
+          <p:nvPr/>
+        </p:nvSpPr>
+        <p:spPr>
+          <a:xfrm>
+            <a:off x="548640" y="3200400"/>
+            <a:ext cx="8046720" cy="1371600"/>
+          </a:xfrm>
+          <a:prstGeom prst="rect">
+            <a:avLst/>
+          </a:prstGeom>
+          <a:noFill/>
+        </p:spPr>
+        <p:txBody>
+          <a:bodyPr wrap="none">
+            <a:spAutoFit/>
+          </a:bodyPr>
+          <a:lstStyle/>
+          <a:p>
+            <a:pPr algn="ctr">
+              <a:defRPr sz="1600">
+                <a:solidFill>
+                  <a:srgbClr val="FFFFFF"/>
+                </a:solidFill>
+              </a:defRPr>
+            </a:pPr>
+            <a:r>
+              <a:t>Club Informatique SUP'PTIC</a:t>
+            </a:r>
+          </a:p>
+          <a:p>
+            <a:pPr algn="ctr">
+              <a:defRPr sz="1600">
+                <a:solidFill>
+                  <a:srgbClr val="FFFFFF"/>
+                </a:solidFill>
+              </a:defRPr>
+            </a:pPr>
+            <a:r>
+              <a:t>SUP'ONE AI — Assistant FAQ intelligent</a:t>
+            </a:r>
+          </a:p>
+          <a:p>
+            <a:pPr algn="ctr">
+              <a:defRPr sz="1600">
+                <a:solidFill>
+                  <a:srgbClr val="FFFFFF"/>
+                </a:solidFill>
+              </a:defRPr>
+            </a:pPr>
+          </a:p>
+          <a:p>
+            <a:pPr algn="ctr">
+              <a:defRPr sz="1600">
+                <a:solidFill>
+                  <a:srgbClr val="FFFFFF"/>
+                </a:solidFill>
+              </a:defRPr>
+            </a:pPr>
+            <a:r>
+              <a:t>Documentation : docs/GUIDE_COMPLET.md · docs/DOCKER.md · docs/MOBILE.md</a:t>
+            </a:r>
+          </a:p>
+        </p:txBody>
+      </p:sp>
+      <p:pic>
+        <p:nvPicPr>
+          <p:cNvPr id="4" name="Picture 3" descr="icone.png"/>
+          <p:cNvPicPr>
+            <a:picLocks noChangeAspect="1"/>
+          </p:cNvPicPr>
+          <p:nvPr/>
+        </p:nvPicPr>
+        <p:blipFill>
+          <a:blip r:embed="rId2"/>
+          <a:stretch>
+            <a:fillRect/>
+          </a:stretch>
+        </p:blipFill>
+        <p:spPr>
+          <a:xfrm>
+            <a:off x="8412480" y="6126480"/>
+            <a:ext cx="548640" cy="548640"/>
+          </a:xfrm>
+          <a:prstGeom prst="rect">
+            <a:avLst/>
+          </a:prstGeom>
+        </p:spPr>
+      </p:pic>
+      <p:sp>
+        <p:nvSpPr>
+          <p:cNvPr id="5" name="TextBox 4"/>
+          <p:cNvSpPr txBox="1"/>
+          <p:nvPr/>
+        </p:nvSpPr>
+        <p:spPr>
+          <a:xfrm>
+            <a:off x="0" y="6492240"/>
+            <a:ext cx="9144000" cy="274320"/>
+          </a:xfrm>
+          <a:prstGeom prst="rect">
+            <a:avLst/>
+          </a:prstGeom>
+          <a:noFill/>
+        </p:spPr>
+        <p:txBody>
+          <a:bodyPr wrap="none">
+            <a:spAutoFit/>
+          </a:bodyPr>
+          <a:lstStyle/>
+          <a:p>
+            <a:pPr algn="ctr">
+              <a:defRPr sz="900">
+                <a:solidFill>
+                  <a:srgbClr val="64748B"/>
+                </a:solidFill>
+              </a:defRPr>
+            </a:pPr>
+            <a:r>
+              <a:t>SUP'ONE AI — Page 17 / 17</a:t>
+            </a:r>
+          </a:p>
+        </p:txBody>
+      </p:sp>
+      <p:sp>
+        <p:nvSpPr>
+          <p:cNvPr id="6" name="Rectangle 5"/>
+          <p:cNvSpPr/>
+          <p:nvPr/>
+        </p:nvSpPr>
+        <p:spPr>
+          <a:xfrm>
+            <a:off x="0" y="6812280"/>
+            <a:ext cx="9144000" cy="45720"/>
+          </a:xfrm>
+          <a:prstGeom prst="rect">
+            <a:avLst/>
+          </a:prstGeom>
+          <a:solidFill>
+            <a:srgbClr val="E2E8F0"/>
+          </a:solidFill>
+          <a:ln>
+            <a:noFill/>
+          </a:ln>
+        </p:spPr>
+        <p:style>
+          <a:lnRef idx="1">
+            <a:schemeClr val="accent1"/>
+          </a:lnRef>
+          <a:fillRef idx="3">
+            <a:schemeClr val="accent1"/>
+          </a:fillRef>
+          <a:effectRef idx="2">
+            <a:schemeClr val="accent1"/>
+          </a:effectRef>
+          <a:fontRef idx="minor">
+            <a:schemeClr val="lt1"/>
+          </a:fontRef>
+        </p:style>
+        <p:txBody>
+          <a:bodyPr rtlCol="0" anchor="ctr"/>
+          <a:lstStyle/>
+          <a:p>
+            <a:pPr algn="ctr"/>
+          </a:p>
+        </p:txBody>
+      </p:sp>
+      <p:sp>
+        <p:nvSpPr>
+          <p:cNvPr id="7" name="Rectangle 6"/>
+          <p:cNvSpPr/>
+          <p:nvPr/>
+        </p:nvSpPr>
+        <p:spPr>
+          <a:xfrm>
+            <a:off x="0" y="6812280"/>
+            <a:ext cx="9144000" cy="45720"/>
+          </a:xfrm>
+          <a:prstGeom prst="rect">
+            <a:avLst/>
+          </a:prstGeom>
+          <a:solidFill>
+            <a:srgbClr val="3B82F6"/>
+          </a:solidFill>
+          <a:ln>
+            <a:noFill/>
+          </a:ln>
+        </p:spPr>
+        <p:style>
+          <a:lnRef idx="1">
+            <a:schemeClr val="accent1"/>
+          </a:lnRef>
+          <a:fillRef idx="3">
+            <a:schemeClr val="accent1"/>
+          </a:fillRef>
+          <a:effectRef idx="2">
+            <a:schemeClr val="accent1"/>
+          </a:effectRef>
+          <a:fontRef idx="minor">
+            <a:schemeClr val="lt1"/>
+          </a:fontRef>
+        </p:style>
+        <p:txBody>
+          <a:bodyPr rtlCol="0" anchor="ctr"/>
+          <a:lstStyle/>
+          <a:p>
+            <a:pPr algn="ctr"/>
+          </a:p>
+        </p:txBody>
+      </p:sp>
+    </p:spTree>
+  </p:cSld>
+  <p:clrMapOvr>
+    <a:masterClrMapping/>
+  </p:clrMapOvr>
+</p:sld>
+</file>
+
+<file path=ppt/slides/slide2.xml><?xml version="1.0" encoding="utf-8"?>
+<p:sld xmlns:a="http://schemas.openxmlformats.org/drawingml/2006/main" xmlns:p="http://schemas.openxmlformats.org/presentationml/2006/main" xmlns:r="http://schemas.openxmlformats.org/officeDocument/2006/relationships">
+  <p:transition>
+    <p:push dir="l"/>
+  </p:transition>
+  <p:cSld>
+    <p:bg>
+      <p:bgPr>
+        <a:solidFill>
+          <a:srgbClr val="1A4594"/>
+        </a:solidFill>
+        <a:effectLst/>
+      </p:bgPr>
+    </p:bg>
+    <p:spTree>
+      <p:nvGrpSpPr>
+        <p:cNvPr id="1" name=""/>
+        <p:cNvGrpSpPr/>
+        <p:nvPr/>
+      </p:nvGrpSpPr>
+      <p:grpSpPr/>
+      <p:sp>
+        <p:nvSpPr>
+          <p:cNvPr id="2" name="TextBox 1"/>
+          <p:cNvSpPr txBox="1"/>
+          <p:nvPr/>
+        </p:nvSpPr>
+        <p:spPr>
+          <a:xfrm>
+            <a:off x="457200" y="2926080"/>
+            <a:ext cx="8229600" cy="1005840"/>
+          </a:xfrm>
+          <a:prstGeom prst="rect">
+            <a:avLst/>
+          </a:prstGeom>
+          <a:noFill/>
+        </p:spPr>
+        <p:txBody>
+          <a:bodyPr wrap="none">
+            <a:spAutoFit/>
+          </a:bodyPr>
+          <a:lstStyle/>
+          <a:p>
+            <a:pPr algn="ctr">
+              <a:defRPr sz="4000" b="1">
+                <a:solidFill>
+                  <a:srgbClr val="FFFFFF"/>
+                </a:solidFill>
+              </a:defRPr>
+            </a:pPr>
+            <a:r>
+              <a:t>I. Introduction &amp; Concept</a:t>
+            </a:r>
+          </a:p>
+        </p:txBody>
+      </p:sp>
+      <p:pic>
+        <p:nvPicPr>
+          <p:cNvPr id="3" name="Picture 2" descr="icone.png"/>
+          <p:cNvPicPr>
+            <a:picLocks noChangeAspect="1"/>
+          </p:cNvPicPr>
+          <p:nvPr/>
+        </p:nvPicPr>
+        <p:blipFill>
+          <a:blip r:embed="rId2"/>
+          <a:stretch>
+            <a:fillRect/>
+          </a:stretch>
+        </p:blipFill>
+        <p:spPr>
+          <a:xfrm>
+            <a:off x="8412480" y="6126480"/>
+            <a:ext cx="548640" cy="548640"/>
+          </a:xfrm>
+          <a:prstGeom prst="rect">
+            <a:avLst/>
+          </a:prstGeom>
+        </p:spPr>
+      </p:pic>
+      <p:sp>
+        <p:nvSpPr>
+          <p:cNvPr id="4" name="TextBox 3"/>
+          <p:cNvSpPr txBox="1"/>
+          <p:nvPr/>
+        </p:nvSpPr>
+        <p:spPr>
+          <a:xfrm>
+            <a:off x="0" y="6492240"/>
+            <a:ext cx="9144000" cy="274320"/>
+          </a:xfrm>
+          <a:prstGeom prst="rect">
+            <a:avLst/>
+          </a:prstGeom>
+          <a:noFill/>
+        </p:spPr>
+        <p:txBody>
+          <a:bodyPr wrap="none">
+            <a:spAutoFit/>
+          </a:bodyPr>
+          <a:lstStyle/>
+          <a:p>
+            <a:pPr algn="ctr">
+              <a:defRPr sz="900">
+                <a:solidFill>
+                  <a:srgbClr val="64748B"/>
+                </a:solidFill>
+              </a:defRPr>
+            </a:pPr>
+            <a:r>
+              <a:t>SUP'ONE AI — Page 2 / 17</a:t>
+            </a:r>
+          </a:p>
+        </p:txBody>
+      </p:sp>
+      <p:sp>
+        <p:nvSpPr>
+          <p:cNvPr id="5" name="Rectangle 4"/>
+          <p:cNvSpPr/>
+          <p:nvPr/>
+        </p:nvSpPr>
+        <p:spPr>
+          <a:xfrm>
+            <a:off x="0" y="6812280"/>
+            <a:ext cx="9144000" cy="45720"/>
+          </a:xfrm>
+          <a:prstGeom prst="rect">
+            <a:avLst/>
+          </a:prstGeom>
+          <a:solidFill>
+            <a:srgbClr val="E2E8F0"/>
+          </a:solidFill>
+          <a:ln>
+            <a:noFill/>
+          </a:ln>
+        </p:spPr>
+        <p:style>
+          <a:lnRef idx="1">
+            <a:schemeClr val="accent1"/>
+          </a:lnRef>
+          <a:fillRef idx="3">
+            <a:schemeClr val="accent1"/>
+          </a:fillRef>
+          <a:effectRef idx="2">
+            <a:schemeClr val="accent1"/>
+          </a:effectRef>
+          <a:fontRef idx="minor">
+            <a:schemeClr val="lt1"/>
+          </a:fontRef>
+        </p:style>
+        <p:txBody>
+          <a:bodyPr rtlCol="0" anchor="ctr"/>
+          <a:lstStyle/>
+          <a:p>
+            <a:pPr algn="ctr"/>
+          </a:p>
+        </p:txBody>
+      </p:sp>
+      <p:sp>
+        <p:nvSpPr>
+          <p:cNvPr id="6" name="Rectangle 5"/>
+          <p:cNvSpPr/>
+          <p:nvPr/>
+        </p:nvSpPr>
+        <p:spPr>
+          <a:xfrm>
+            <a:off x="0" y="6812280"/>
+            <a:ext cx="1075764" cy="45720"/>
+          </a:xfrm>
+          <a:prstGeom prst="rect">
+            <a:avLst/>
+          </a:prstGeom>
+          <a:solidFill>
+            <a:srgbClr val="3B82F6"/>
+          </a:solidFill>
+          <a:ln>
+            <a:noFill/>
+          </a:ln>
+        </p:spPr>
+        <p:style>
+          <a:lnRef idx="1">
+            <a:schemeClr val="accent1"/>
+          </a:lnRef>
+          <a:fillRef idx="3">
+            <a:schemeClr val="accent1"/>
+          </a:fillRef>
+          <a:effectRef idx="2">
+            <a:schemeClr val="accent1"/>
+          </a:effectRef>
+          <a:fontRef idx="minor">
+            <a:schemeClr val="lt1"/>
+          </a:fontRef>
+        </p:style>
+        <p:txBody>
+          <a:bodyPr rtlCol="0" anchor="ctr"/>
+          <a:lstStyle/>
+          <a:p>
+            <a:pPr algn="ctr"/>
+          </a:p>
+        </p:txBody>
+      </p:sp>
+    </p:spTree>
+  </p:cSld>
+  <p:clrMapOvr>
+    <a:masterClrMapping/>
+  </p:clrMapOvr>
+</p:sld>
+</file>
+
+<file path=ppt/slides/slide3.xml><?xml version="1.0" encoding="utf-8"?>
+<p:sld xmlns:a="http://schemas.openxmlformats.org/drawingml/2006/main" xmlns:p="http://schemas.openxmlformats.org/presentationml/2006/main" xmlns:r="http://schemas.openxmlformats.org/officeDocument/2006/relationships">
+  <p:transition>
+    <p:push dir="l"/>
+  </p:transition>
   <p:cSld>
     <p:bg>
       <p:bgPr>
@@ -4897,7 +6531,7 @@
               </a:defRPr>
             </a:pPr>
             <a:r>
-              <a:t>Pipeline Gen3 — RAG en 4 niveaux</a:t>
+              <a:t>Contexte &amp; enjeux</a:t>
             </a:r>
           </a:p>
         </p:txBody>
@@ -4910,7 +6544,7 @@
         </p:nvSpPr>
         <p:spPr>
           <a:xfrm>
-            <a:off x="548640" y="1691640"/>
+            <a:off x="548640" y="1737360"/>
             <a:ext cx="8046720" cy="4572000"/>
           </a:xfrm>
           <a:prstGeom prst="rect">
@@ -4928,14 +6562,14 @@
               <a:spcAft>
                 <a:spcPts val="1000"/>
               </a:spcAft>
-              <a:defRPr sz="1700">
+              <a:defRPr sz="1800">
                 <a:solidFill>
                   <a:srgbClr val="070F1F"/>
                 </a:solidFill>
               </a:defRPr>
             </a:pPr>
             <a:r>
-              <a:t>Niveau 1 — Règles conversationnelles : salutations, hors-sujet, intents métier.</a:t>
+              <a:t>SUP'PTIC accueille chaque année de nombreux étudiants, parents et visiteurs.</a:t>
             </a:r>
           </a:p>
           <a:p>
@@ -4943,14 +6577,14 @@
               <a:spcAft>
                 <a:spcPts val="1000"/>
               </a:spcAft>
-              <a:defRPr sz="1700">
+              <a:defRPr sz="1800">
                 <a:solidFill>
                   <a:srgbClr val="070F1F"/>
                 </a:solidFill>
               </a:defRPr>
             </a:pPr>
             <a:r>
-              <a:t>Niveau 2 — Recherche sémantique FAISS (embeddings MiniLM-L6-v2).</a:t>
+              <a:t>Les mêmes questions reviennent : inscriptions, frais, filières, examens, vie étudiante…</a:t>
             </a:r>
           </a:p>
           <a:p>
@@ -4958,14 +6592,14 @@
               <a:spcAft>
                 <a:spcPts val="1000"/>
               </a:spcAft>
-              <a:defRPr sz="1700">
+              <a:defRPr sz="1800">
                 <a:solidFill>
                   <a:srgbClr val="070F1F"/>
                 </a:solidFill>
               </a:defRPr>
             </a:pPr>
             <a:r>
-              <a:t>Niveau 3 — Repli TF-IDF optimisé (gestion mémoire, ~11 000 FAQ).</a:t>
+              <a:t>Les services administratifs et pédagogiques sont sollicités de manière répétitive.</a:t>
             </a:r>
           </a:p>
           <a:p>
@@ -4973,14 +6607,14 @@
               <a:spcAft>
                 <a:spcPts val="1000"/>
               </a:spcAft>
-              <a:defRPr sz="1700">
+              <a:defRPr sz="1800">
                 <a:solidFill>
                   <a:srgbClr val="070F1F"/>
                 </a:solidFill>
               </a:defRPr>
             </a:pPr>
             <a:r>
-              <a:t>Niveau 4 — Génération LLM Google Gemini (réponses contextualisées).</a:t>
+              <a:t>Besoin d'un canal d'information accessible 24h/24, fiable et multicanal.</a:t>
             </a:r>
           </a:p>
           <a:p>
@@ -4988,30 +6622,160 @@
               <a:spcAft>
                 <a:spcPts val="1000"/>
               </a:spcAft>
-              <a:defRPr sz="1700">
+              <a:defRPr sz="1800">
                 <a:solidFill>
                   <a:srgbClr val="070F1F"/>
                 </a:solidFill>
               </a:defRPr>
             </a:pPr>
             <a:r>
-              <a:t>Cohérence question ↔ réponse : sélection intelligente + seuils de confiance.</a:t>
-            </a:r>
-          </a:p>
-          <a:p>
-            <a:pPr>
-              <a:spcAft>
-                <a:spcPts val="1000"/>
-              </a:spcAft>
-              <a:defRPr sz="1700">
-                <a:solidFill>
-                  <a:srgbClr val="070F1F"/>
-                </a:solidFill>
-              </a:defRPr>
-            </a:pPr>
-            <a:r>
-              <a:t>Si Gen3 indisponible → Phase 1 TF-IDF reste pleinement fonctionnelle.</a:t>
-            </a:r>
+              <a:t>Objectif : réduire la charge informative tout en améliorant l'expérience utilisateur.</a:t>
+            </a:r>
+          </a:p>
+        </p:txBody>
+      </p:sp>
+      <p:pic>
+        <p:nvPicPr>
+          <p:cNvPr id="4" name="Picture 3" descr="icone.png"/>
+          <p:cNvPicPr>
+            <a:picLocks noChangeAspect="1"/>
+          </p:cNvPicPr>
+          <p:nvPr/>
+        </p:nvPicPr>
+        <p:blipFill>
+          <a:blip r:embed="rId2"/>
+          <a:stretch>
+            <a:fillRect/>
+          </a:stretch>
+        </p:blipFill>
+        <p:spPr>
+          <a:xfrm>
+            <a:off x="8412480" y="6126480"/>
+            <a:ext cx="548640" cy="548640"/>
+          </a:xfrm>
+          <a:prstGeom prst="rect">
+            <a:avLst/>
+          </a:prstGeom>
+        </p:spPr>
+      </p:pic>
+      <p:sp>
+        <p:nvSpPr>
+          <p:cNvPr id="5" name="TextBox 4"/>
+          <p:cNvSpPr txBox="1"/>
+          <p:nvPr/>
+        </p:nvSpPr>
+        <p:spPr>
+          <a:xfrm>
+            <a:off x="0" y="6492240"/>
+            <a:ext cx="9144000" cy="274320"/>
+          </a:xfrm>
+          <a:prstGeom prst="rect">
+            <a:avLst/>
+          </a:prstGeom>
+          <a:noFill/>
+        </p:spPr>
+        <p:txBody>
+          <a:bodyPr wrap="none">
+            <a:spAutoFit/>
+          </a:bodyPr>
+          <a:lstStyle/>
+          <a:p>
+            <a:pPr algn="ctr">
+              <a:defRPr sz="900">
+                <a:solidFill>
+                  <a:srgbClr val="64748B"/>
+                </a:solidFill>
+              </a:defRPr>
+            </a:pPr>
+            <a:r>
+              <a:t>SUP'ONE AI — Page 3 / 17</a:t>
+            </a:r>
+          </a:p>
+        </p:txBody>
+      </p:sp>
+      <p:sp>
+        <p:nvSpPr>
+          <p:cNvPr id="6" name="Rectangle 5"/>
+          <p:cNvSpPr/>
+          <p:nvPr/>
+        </p:nvSpPr>
+        <p:spPr>
+          <a:xfrm>
+            <a:off x="0" y="6812280"/>
+            <a:ext cx="9144000" cy="45720"/>
+          </a:xfrm>
+          <a:prstGeom prst="rect">
+            <a:avLst/>
+          </a:prstGeom>
+          <a:solidFill>
+            <a:srgbClr val="E2E8F0"/>
+          </a:solidFill>
+          <a:ln>
+            <a:noFill/>
+          </a:ln>
+        </p:spPr>
+        <p:style>
+          <a:lnRef idx="1">
+            <a:schemeClr val="accent1"/>
+          </a:lnRef>
+          <a:fillRef idx="3">
+            <a:schemeClr val="accent1"/>
+          </a:fillRef>
+          <a:effectRef idx="2">
+            <a:schemeClr val="accent1"/>
+          </a:effectRef>
+          <a:fontRef idx="minor">
+            <a:schemeClr val="lt1"/>
+          </a:fontRef>
+        </p:style>
+        <p:txBody>
+          <a:bodyPr rtlCol="0" anchor="ctr"/>
+          <a:lstStyle/>
+          <a:p>
+            <a:pPr algn="ctr"/>
+          </a:p>
+        </p:txBody>
+      </p:sp>
+      <p:sp>
+        <p:nvSpPr>
+          <p:cNvPr id="7" name="Rectangle 6"/>
+          <p:cNvSpPr/>
+          <p:nvPr/>
+        </p:nvSpPr>
+        <p:spPr>
+          <a:xfrm>
+            <a:off x="0" y="6812280"/>
+            <a:ext cx="1613647" cy="45720"/>
+          </a:xfrm>
+          <a:prstGeom prst="rect">
+            <a:avLst/>
+          </a:prstGeom>
+          <a:solidFill>
+            <a:srgbClr val="3B82F6"/>
+          </a:solidFill>
+          <a:ln>
+            <a:noFill/>
+          </a:ln>
+        </p:spPr>
+        <p:style>
+          <a:lnRef idx="1">
+            <a:schemeClr val="accent1"/>
+          </a:lnRef>
+          <a:fillRef idx="3">
+            <a:schemeClr val="accent1"/>
+          </a:fillRef>
+          <a:effectRef idx="2">
+            <a:schemeClr val="accent1"/>
+          </a:effectRef>
+          <a:fontRef idx="minor">
+            <a:schemeClr val="lt1"/>
+          </a:fontRef>
+        </p:style>
+        <p:txBody>
+          <a:bodyPr rtlCol="0" anchor="ctr"/>
+          <a:lstStyle/>
+          <a:p>
+            <a:pPr algn="ctr"/>
           </a:p>
         </p:txBody>
       </p:sp>
@@ -5023,8 +6787,11 @@
 </p:sld>
 </file>
 
-<file path=ppt/slides/slide7.xml><?xml version="1.0" encoding="utf-8"?>
+<file path=ppt/slides/slide4.xml><?xml version="1.0" encoding="utf-8"?>
 <p:sld xmlns:a="http://schemas.openxmlformats.org/drawingml/2006/main" xmlns:p="http://schemas.openxmlformats.org/presentationml/2006/main" xmlns:r="http://schemas.openxmlformats.org/officeDocument/2006/relationships">
+  <p:transition>
+    <p:push dir="t"/>
+  </p:transition>
   <p:cSld>
     <p:bg>
       <p:bgPr>
@@ -5088,7 +6855,7 @@
               </a:defRPr>
             </a:pPr>
             <a:r>
-              <a:t>Stack technique</a:t>
+              <a:t>La solution : SUP'ONE AI</a:t>
             </a:r>
           </a:p>
         </p:txBody>
@@ -5101,8 +6868,145 @@
         </p:nvSpPr>
         <p:spPr>
           <a:xfrm>
-            <a:off x="457200" y="1645920"/>
-            <a:ext cx="3931920" cy="365760"/>
+            <a:off x="548640" y="1737360"/>
+            <a:ext cx="8046720" cy="4572000"/>
+          </a:xfrm>
+          <a:prstGeom prst="rect">
+            <a:avLst/>
+          </a:prstGeom>
+          <a:noFill/>
+        </p:spPr>
+        <p:txBody>
+          <a:bodyPr wrap="square">
+            <a:spAutoFit/>
+          </a:bodyPr>
+          <a:lstStyle/>
+          <a:p>
+            <a:pPr>
+              <a:spcAft>
+                <a:spcPts val="1000"/>
+              </a:spcAft>
+              <a:defRPr sz="1800">
+                <a:solidFill>
+                  <a:srgbClr val="070F1F"/>
+                </a:solidFill>
+              </a:defRPr>
+            </a:pPr>
+            <a:r>
+              <a:t>Chatbot conversationnel dédié à l'établissement SUP'PTIC.</a:t>
+            </a:r>
+          </a:p>
+          <a:p>
+            <a:pPr>
+              <a:spcAft>
+                <a:spcPts val="1000"/>
+              </a:spcAft>
+              <a:defRPr sz="1800">
+                <a:solidFill>
+                  <a:srgbClr val="070F1F"/>
+                </a:solidFill>
+              </a:defRPr>
+            </a:pPr>
+            <a:r>
+              <a:t>Répond aux questions fréquentes à partir d'une base de FAQ structurée.</a:t>
+            </a:r>
+          </a:p>
+          <a:p>
+            <a:pPr>
+              <a:spcAft>
+                <a:spcPts val="1000"/>
+              </a:spcAft>
+              <a:defRPr sz="1800">
+                <a:solidFill>
+                  <a:srgbClr val="070F1F"/>
+                </a:solidFill>
+              </a:defRPr>
+            </a:pPr>
+            <a:r>
+              <a:t>Interface moderne type ChatGPT — web, PWA installable et application Android.</a:t>
+            </a:r>
+          </a:p>
+          <a:p>
+            <a:pPr>
+              <a:spcAft>
+                <a:spcPts val="1000"/>
+              </a:spcAft>
+              <a:defRPr sz="1800">
+                <a:solidFill>
+                  <a:srgbClr val="070F1F"/>
+                </a:solidFill>
+              </a:defRPr>
+            </a:pPr>
+            <a:r>
+              <a:t>Deux moteurs de réponse complémentaires : recherche classique + IA (RAG).</a:t>
+            </a:r>
+          </a:p>
+          <a:p>
+            <a:pPr>
+              <a:spcAft>
+                <a:spcPts val="1000"/>
+              </a:spcAft>
+              <a:defRPr sz="1800">
+                <a:solidFill>
+                  <a:srgbClr val="070F1F"/>
+                </a:solidFill>
+              </a:defRPr>
+            </a:pPr>
+            <a:r>
+              <a:t>Système de feedback pour améliorer continuellement les réponses.</a:t>
+            </a:r>
+          </a:p>
+          <a:p>
+            <a:pPr>
+              <a:spcAft>
+                <a:spcPts val="1000"/>
+              </a:spcAft>
+              <a:defRPr sz="1800">
+                <a:solidFill>
+                  <a:srgbClr val="070F1F"/>
+                </a:solidFill>
+              </a:defRPr>
+            </a:pPr>
+            <a:r>
+              <a:t>Déployable sur serveur interne (Docker) ou dans le cloud (Railway + Netlify).</a:t>
+            </a:r>
+          </a:p>
+        </p:txBody>
+      </p:sp>
+      <p:pic>
+        <p:nvPicPr>
+          <p:cNvPr id="4" name="Picture 3" descr="icone.png"/>
+          <p:cNvPicPr>
+            <a:picLocks noChangeAspect="1"/>
+          </p:cNvPicPr>
+          <p:nvPr/>
+        </p:nvPicPr>
+        <p:blipFill>
+          <a:blip r:embed="rId2"/>
+          <a:stretch>
+            <a:fillRect/>
+          </a:stretch>
+        </p:blipFill>
+        <p:spPr>
+          <a:xfrm>
+            <a:off x="8412480" y="6126480"/>
+            <a:ext cx="548640" cy="548640"/>
+          </a:xfrm>
+          <a:prstGeom prst="rect">
+            <a:avLst/>
+          </a:prstGeom>
+        </p:spPr>
+      </p:pic>
+      <p:sp>
+        <p:nvSpPr>
+          <p:cNvPr id="5" name="TextBox 4"/>
+          <p:cNvSpPr txBox="1"/>
+          <p:nvPr/>
+        </p:nvSpPr>
+        <p:spPr>
+          <a:xfrm>
+            <a:off x="0" y="6492240"/>
+            <a:ext cx="9144000" cy="274320"/>
           </a:xfrm>
           <a:prstGeom prst="rect">
             <a:avLst/>
@@ -5115,247 +7019,102 @@
           </a:bodyPr>
           <a:lstStyle/>
           <a:p>
-            <a:pPr>
-              <a:defRPr sz="1600" b="1">
-                <a:solidFill>
-                  <a:srgbClr val="1A4594"/>
-                </a:solidFill>
-              </a:defRPr>
-            </a:pPr>
-            <a:r>
-              <a:t>Backend</a:t>
-            </a:r>
-          </a:p>
-        </p:txBody>
-      </p:sp>
-      <p:sp>
-        <p:nvSpPr>
-          <p:cNvPr id="4" name="TextBox 3"/>
-          <p:cNvSpPr txBox="1"/>
-          <p:nvPr/>
-        </p:nvSpPr>
-        <p:spPr>
-          <a:xfrm>
-            <a:off x="457200" y="2011680"/>
-            <a:ext cx="3931920" cy="4114800"/>
-          </a:xfrm>
-          <a:prstGeom prst="rect">
-            <a:avLst/>
-          </a:prstGeom>
-          <a:noFill/>
-        </p:spPr>
-        <p:txBody>
-          <a:bodyPr wrap="none">
-            <a:spAutoFit/>
-          </a:bodyPr>
-          <a:lstStyle/>
-          <a:p>
-            <a:pPr>
-              <a:spcAft>
-                <a:spcPts val="600"/>
-              </a:spcAft>
-              <a:defRPr sz="1400">
-                <a:solidFill>
-                  <a:srgbClr val="070F1F"/>
-                </a:solidFill>
-              </a:defRPr>
-            </a:pPr>
-            <a:r>
-              <a:t>• Python 3.13 · Django 4.2 · DRF</a:t>
-            </a:r>
-          </a:p>
-          <a:p>
-            <a:pPr>
-              <a:spcAft>
-                <a:spcPts val="600"/>
-              </a:spcAft>
-              <a:defRPr sz="1400">
-                <a:solidFill>
-                  <a:srgbClr val="070F1F"/>
-                </a:solidFill>
-              </a:defRPr>
-            </a:pPr>
-            <a:r>
-              <a:t>• scikit-learn · spaCy (fr)</a:t>
-            </a:r>
-          </a:p>
-          <a:p>
-            <a:pPr>
-              <a:spcAft>
-                <a:spcPts val="600"/>
-              </a:spcAft>
-              <a:defRPr sz="1400">
-                <a:solidFill>
-                  <a:srgbClr val="070F1F"/>
-                </a:solidFill>
-              </a:defRPr>
-            </a:pPr>
-            <a:r>
-              <a:t>• FAISS · sentence-transformers</a:t>
-            </a:r>
-          </a:p>
-          <a:p>
-            <a:pPr>
-              <a:spcAft>
-                <a:spcPts val="600"/>
-              </a:spcAft>
-              <a:defRPr sz="1400">
-                <a:solidFill>
-                  <a:srgbClr val="070F1F"/>
-                </a:solidFill>
-              </a:defRPr>
-            </a:pPr>
-            <a:r>
-              <a:t>• Google Gemini 2.0 Flash</a:t>
-            </a:r>
-          </a:p>
-          <a:p>
-            <a:pPr>
-              <a:spcAft>
-                <a:spcPts val="600"/>
-              </a:spcAft>
-              <a:defRPr sz="1400">
-                <a:solidFill>
-                  <a:srgbClr val="070F1F"/>
-                </a:solidFill>
-              </a:defRPr>
-            </a:pPr>
-            <a:r>
-              <a:t>• PostgreSQL · Gunicorn · Whitenoise</a:t>
-            </a:r>
-          </a:p>
-        </p:txBody>
-      </p:sp>
-      <p:sp>
-        <p:nvSpPr>
-          <p:cNvPr id="5" name="TextBox 4"/>
-          <p:cNvSpPr txBox="1"/>
-          <p:nvPr/>
-        </p:nvSpPr>
-        <p:spPr>
-          <a:xfrm>
-            <a:off x="4754880" y="1645920"/>
-            <a:ext cx="3931920" cy="365760"/>
-          </a:xfrm>
-          <a:prstGeom prst="rect">
-            <a:avLst/>
-          </a:prstGeom>
-          <a:noFill/>
-        </p:spPr>
-        <p:txBody>
-          <a:bodyPr wrap="none">
-            <a:spAutoFit/>
-          </a:bodyPr>
-          <a:lstStyle/>
-          <a:p>
-            <a:pPr>
-              <a:defRPr sz="1600" b="1">
-                <a:solidFill>
-                  <a:srgbClr val="1A4594"/>
-                </a:solidFill>
-              </a:defRPr>
-            </a:pPr>
-            <a:r>
-              <a:t>Frontend &amp; DevOps</a:t>
-            </a:r>
-          </a:p>
-        </p:txBody>
-      </p:sp>
-      <p:sp>
-        <p:nvSpPr>
-          <p:cNvPr id="6" name="TextBox 5"/>
-          <p:cNvSpPr txBox="1"/>
-          <p:nvPr/>
-        </p:nvSpPr>
-        <p:spPr>
-          <a:xfrm>
-            <a:off x="4754880" y="2011680"/>
-            <a:ext cx="3931920" cy="4114800"/>
-          </a:xfrm>
-          <a:prstGeom prst="rect">
-            <a:avLst/>
-          </a:prstGeom>
-          <a:noFill/>
-        </p:spPr>
-        <p:txBody>
-          <a:bodyPr wrap="none">
-            <a:spAutoFit/>
-          </a:bodyPr>
-          <a:lstStyle/>
-          <a:p>
-            <a:pPr>
-              <a:spcAft>
-                <a:spcPts val="600"/>
-              </a:spcAft>
-              <a:defRPr sz="1400">
-                <a:solidFill>
-                  <a:srgbClr val="070F1F"/>
-                </a:solidFill>
-              </a:defRPr>
-            </a:pPr>
-            <a:r>
-              <a:t>• React 19 · Vite 8 · PWA</a:t>
-            </a:r>
-          </a:p>
-          <a:p>
-            <a:pPr>
-              <a:spcAft>
-                <a:spcPts val="600"/>
-              </a:spcAft>
-              <a:defRPr sz="1400">
-                <a:solidFill>
-                  <a:srgbClr val="070F1F"/>
-                </a:solidFill>
-              </a:defRPr>
-            </a:pPr>
-            <a:r>
-              <a:t>• Capacitor 7 (APK Android)</a:t>
-            </a:r>
-          </a:p>
-          <a:p>
-            <a:pPr>
-              <a:spcAft>
-                <a:spcPts val="600"/>
-              </a:spcAft>
-              <a:defRPr sz="1400">
-                <a:solidFill>
-                  <a:srgbClr val="070F1F"/>
-                </a:solidFill>
-              </a:defRPr>
-            </a:pPr>
-            <a:r>
-              <a:t>• Docker Compose (3 services)</a:t>
-            </a:r>
-          </a:p>
-          <a:p>
-            <a:pPr>
-              <a:spcAft>
-                <a:spcPts val="600"/>
-              </a:spcAft>
-              <a:defRPr sz="1400">
-                <a:solidFill>
-                  <a:srgbClr val="070F1F"/>
-                </a:solidFill>
-              </a:defRPr>
-            </a:pPr>
-            <a:r>
-              <a:t>• Railway · Netlify · GitHub Actions</a:t>
-            </a:r>
-          </a:p>
-          <a:p>
-            <a:pPr>
-              <a:spcAft>
-                <a:spcPts val="600"/>
-              </a:spcAft>
-              <a:defRPr sz="1400">
-                <a:solidFill>
-                  <a:srgbClr val="070F1F"/>
-                </a:solidFill>
-              </a:defRPr>
-            </a:pPr>
-            <a:r>
-              <a:t>• Nginx · healthchecks · volumes ML</a:t>
-            </a:r>
+            <a:pPr algn="ctr">
+              <a:defRPr sz="900">
+                <a:solidFill>
+                  <a:srgbClr val="64748B"/>
+                </a:solidFill>
+              </a:defRPr>
+            </a:pPr>
+            <a:r>
+              <a:t>SUP'ONE AI — Page 4 / 17</a:t>
+            </a:r>
+          </a:p>
+        </p:txBody>
+      </p:sp>
+      <p:sp>
+        <p:nvSpPr>
+          <p:cNvPr id="6" name="Rectangle 5"/>
+          <p:cNvSpPr/>
+          <p:nvPr/>
+        </p:nvSpPr>
+        <p:spPr>
+          <a:xfrm>
+            <a:off x="0" y="6812280"/>
+            <a:ext cx="9144000" cy="45720"/>
+          </a:xfrm>
+          <a:prstGeom prst="rect">
+            <a:avLst/>
+          </a:prstGeom>
+          <a:solidFill>
+            <a:srgbClr val="E2E8F0"/>
+          </a:solidFill>
+          <a:ln>
+            <a:noFill/>
+          </a:ln>
+        </p:spPr>
+        <p:style>
+          <a:lnRef idx="1">
+            <a:schemeClr val="accent1"/>
+          </a:lnRef>
+          <a:fillRef idx="3">
+            <a:schemeClr val="accent1"/>
+          </a:fillRef>
+          <a:effectRef idx="2">
+            <a:schemeClr val="accent1"/>
+          </a:effectRef>
+          <a:fontRef idx="minor">
+            <a:schemeClr val="lt1"/>
+          </a:fontRef>
+        </p:style>
+        <p:txBody>
+          <a:bodyPr rtlCol="0" anchor="ctr"/>
+          <a:lstStyle/>
+          <a:p>
+            <a:pPr algn="ctr"/>
+          </a:p>
+        </p:txBody>
+      </p:sp>
+      <p:sp>
+        <p:nvSpPr>
+          <p:cNvPr id="7" name="Rectangle 6"/>
+          <p:cNvSpPr/>
+          <p:nvPr/>
+        </p:nvSpPr>
+        <p:spPr>
+          <a:xfrm>
+            <a:off x="0" y="6812280"/>
+            <a:ext cx="2151529" cy="45720"/>
+          </a:xfrm>
+          <a:prstGeom prst="rect">
+            <a:avLst/>
+          </a:prstGeom>
+          <a:solidFill>
+            <a:srgbClr val="3B82F6"/>
+          </a:solidFill>
+          <a:ln>
+            <a:noFill/>
+          </a:ln>
+        </p:spPr>
+        <p:style>
+          <a:lnRef idx="1">
+            <a:schemeClr val="accent1"/>
+          </a:lnRef>
+          <a:fillRef idx="3">
+            <a:schemeClr val="accent1"/>
+          </a:fillRef>
+          <a:effectRef idx="2">
+            <a:schemeClr val="accent1"/>
+          </a:effectRef>
+          <a:fontRef idx="minor">
+            <a:schemeClr val="lt1"/>
+          </a:fontRef>
+        </p:style>
+        <p:txBody>
+          <a:bodyPr rtlCol="0" anchor="ctr"/>
+          <a:lstStyle/>
+          <a:p>
+            <a:pPr algn="ctr"/>
           </a:p>
         </p:txBody>
       </p:sp>
@@ -5367,8 +7126,220 @@
 </p:sld>
 </file>
 
-<file path=ppt/slides/slide8.xml><?xml version="1.0" encoding="utf-8"?>
+<file path=ppt/slides/slide5.xml><?xml version="1.0" encoding="utf-8"?>
 <p:sld xmlns:a="http://schemas.openxmlformats.org/drawingml/2006/main" xmlns:p="http://schemas.openxmlformats.org/presentationml/2006/main" xmlns:r="http://schemas.openxmlformats.org/officeDocument/2006/relationships">
+  <p:transition>
+    <p:push dir="l"/>
+  </p:transition>
+  <p:cSld>
+    <p:bg>
+      <p:bgPr>
+        <a:solidFill>
+          <a:srgbClr val="1A4594"/>
+        </a:solidFill>
+        <a:effectLst/>
+      </p:bgPr>
+    </p:bg>
+    <p:spTree>
+      <p:nvGrpSpPr>
+        <p:cNvPr id="1" name=""/>
+        <p:cNvGrpSpPr/>
+        <p:nvPr/>
+      </p:nvGrpSpPr>
+      <p:grpSpPr/>
+      <p:sp>
+        <p:nvSpPr>
+          <p:cNvPr id="2" name="TextBox 1"/>
+          <p:cNvSpPr txBox="1"/>
+          <p:nvPr/>
+        </p:nvSpPr>
+        <p:spPr>
+          <a:xfrm>
+            <a:off x="457200" y="2926080"/>
+            <a:ext cx="8229600" cy="1005840"/>
+          </a:xfrm>
+          <a:prstGeom prst="rect">
+            <a:avLst/>
+          </a:prstGeom>
+          <a:noFill/>
+        </p:spPr>
+        <p:txBody>
+          <a:bodyPr wrap="none">
+            <a:spAutoFit/>
+          </a:bodyPr>
+          <a:lstStyle/>
+          <a:p>
+            <a:pPr algn="ctr">
+              <a:defRPr sz="4000" b="1">
+                <a:solidFill>
+                  <a:srgbClr val="FFFFFF"/>
+                </a:solidFill>
+              </a:defRPr>
+            </a:pPr>
+            <a:r>
+              <a:t>II. Architecture &amp; Pipeline</a:t>
+            </a:r>
+          </a:p>
+        </p:txBody>
+      </p:sp>
+      <p:pic>
+        <p:nvPicPr>
+          <p:cNvPr id="3" name="Picture 2" descr="icone.png"/>
+          <p:cNvPicPr>
+            <a:picLocks noChangeAspect="1"/>
+          </p:cNvPicPr>
+          <p:nvPr/>
+        </p:nvPicPr>
+        <p:blipFill>
+          <a:blip r:embed="rId2"/>
+          <a:stretch>
+            <a:fillRect/>
+          </a:stretch>
+        </p:blipFill>
+        <p:spPr>
+          <a:xfrm>
+            <a:off x="8412480" y="6126480"/>
+            <a:ext cx="548640" cy="548640"/>
+          </a:xfrm>
+          <a:prstGeom prst="rect">
+            <a:avLst/>
+          </a:prstGeom>
+        </p:spPr>
+      </p:pic>
+      <p:sp>
+        <p:nvSpPr>
+          <p:cNvPr id="4" name="TextBox 3"/>
+          <p:cNvSpPr txBox="1"/>
+          <p:nvPr/>
+        </p:nvSpPr>
+        <p:spPr>
+          <a:xfrm>
+            <a:off x="0" y="6492240"/>
+            <a:ext cx="9144000" cy="274320"/>
+          </a:xfrm>
+          <a:prstGeom prst="rect">
+            <a:avLst/>
+          </a:prstGeom>
+          <a:noFill/>
+        </p:spPr>
+        <p:txBody>
+          <a:bodyPr wrap="none">
+            <a:spAutoFit/>
+          </a:bodyPr>
+          <a:lstStyle/>
+          <a:p>
+            <a:pPr algn="ctr">
+              <a:defRPr sz="900">
+                <a:solidFill>
+                  <a:srgbClr val="64748B"/>
+                </a:solidFill>
+              </a:defRPr>
+            </a:pPr>
+            <a:r>
+              <a:t>SUP'ONE AI — Page 5 / 17</a:t>
+            </a:r>
+          </a:p>
+        </p:txBody>
+      </p:sp>
+      <p:sp>
+        <p:nvSpPr>
+          <p:cNvPr id="5" name="Rectangle 4"/>
+          <p:cNvSpPr/>
+          <p:nvPr/>
+        </p:nvSpPr>
+        <p:spPr>
+          <a:xfrm>
+            <a:off x="0" y="6812280"/>
+            <a:ext cx="9144000" cy="45720"/>
+          </a:xfrm>
+          <a:prstGeom prst="rect">
+            <a:avLst/>
+          </a:prstGeom>
+          <a:solidFill>
+            <a:srgbClr val="E2E8F0"/>
+          </a:solidFill>
+          <a:ln>
+            <a:noFill/>
+          </a:ln>
+        </p:spPr>
+        <p:style>
+          <a:lnRef idx="1">
+            <a:schemeClr val="accent1"/>
+          </a:lnRef>
+          <a:fillRef idx="3">
+            <a:schemeClr val="accent1"/>
+          </a:fillRef>
+          <a:effectRef idx="2">
+            <a:schemeClr val="accent1"/>
+          </a:effectRef>
+          <a:fontRef idx="minor">
+            <a:schemeClr val="lt1"/>
+          </a:fontRef>
+        </p:style>
+        <p:txBody>
+          <a:bodyPr rtlCol="0" anchor="ctr"/>
+          <a:lstStyle/>
+          <a:p>
+            <a:pPr algn="ctr"/>
+          </a:p>
+        </p:txBody>
+      </p:sp>
+      <p:sp>
+        <p:nvSpPr>
+          <p:cNvPr id="6" name="Rectangle 5"/>
+          <p:cNvSpPr/>
+          <p:nvPr/>
+        </p:nvSpPr>
+        <p:spPr>
+          <a:xfrm>
+            <a:off x="0" y="6812280"/>
+            <a:ext cx="2689411" cy="45720"/>
+          </a:xfrm>
+          <a:prstGeom prst="rect">
+            <a:avLst/>
+          </a:prstGeom>
+          <a:solidFill>
+            <a:srgbClr val="3B82F6"/>
+          </a:solidFill>
+          <a:ln>
+            <a:noFill/>
+          </a:ln>
+        </p:spPr>
+        <p:style>
+          <a:lnRef idx="1">
+            <a:schemeClr val="accent1"/>
+          </a:lnRef>
+          <a:fillRef idx="3">
+            <a:schemeClr val="accent1"/>
+          </a:fillRef>
+          <a:effectRef idx="2">
+            <a:schemeClr val="accent1"/>
+          </a:effectRef>
+          <a:fontRef idx="minor">
+            <a:schemeClr val="lt1"/>
+          </a:fontRef>
+        </p:style>
+        <p:txBody>
+          <a:bodyPr rtlCol="0" anchor="ctr"/>
+          <a:lstStyle/>
+          <a:p>
+            <a:pPr algn="ctr"/>
+          </a:p>
+        </p:txBody>
+      </p:sp>
+    </p:spTree>
+  </p:cSld>
+  <p:clrMapOvr>
+    <a:masterClrMapping/>
+  </p:clrMapOvr>
+</p:sld>
+</file>
+
+<file path=ppt/slides/slide6.xml><?xml version="1.0" encoding="utf-8"?>
+<p:sld xmlns:a="http://schemas.openxmlformats.org/drawingml/2006/main" xmlns:p="http://schemas.openxmlformats.org/presentationml/2006/main" xmlns:r="http://schemas.openxmlformats.org/officeDocument/2006/relationships">
+  <p:transition>
+    <p:push dir="l"/>
+  </p:transition>
   <p:cSld>
     <p:bg>
       <p:bgPr>
@@ -5432,7 +7403,7 @@
               </a:defRPr>
             </a:pPr>
             <a:r>
-              <a:t>Interface utilisateur</a:t>
+              <a:t>Fonctionnalités clés</a:t>
             </a:r>
           </a:p>
         </p:txBody>
@@ -5445,8 +7416,8 @@
         </p:nvSpPr>
         <p:spPr>
           <a:xfrm>
-            <a:off x="548640" y="1737360"/>
-            <a:ext cx="8046720" cy="4572000"/>
+            <a:off x="457200" y="1645920"/>
+            <a:ext cx="3931920" cy="365760"/>
           </a:xfrm>
           <a:prstGeom prst="rect">
             <a:avLst/>
@@ -5454,99 +7425,427 @@
           <a:noFill/>
         </p:spPr>
         <p:txBody>
-          <a:bodyPr wrap="square">
+          <a:bodyPr wrap="none">
             <a:spAutoFit/>
           </a:bodyPr>
           <a:lstStyle/>
           <a:p>
             <a:pPr>
+              <a:defRPr sz="1600" b="1">
+                <a:solidFill>
+                  <a:srgbClr val="1A4594"/>
+                </a:solidFill>
+              </a:defRPr>
+            </a:pPr>
+            <a:r>
+              <a:t>Pour les utilisateurs</a:t>
+            </a:r>
+          </a:p>
+        </p:txBody>
+      </p:sp>
+      <p:sp>
+        <p:nvSpPr>
+          <p:cNvPr id="4" name="TextBox 3"/>
+          <p:cNvSpPr txBox="1"/>
+          <p:nvPr/>
+        </p:nvSpPr>
+        <p:spPr>
+          <a:xfrm>
+            <a:off x="457200" y="2011680"/>
+            <a:ext cx="3931920" cy="4114800"/>
+          </a:xfrm>
+          <a:prstGeom prst="rect">
+            <a:avLst/>
+          </a:prstGeom>
+          <a:noFill/>
+        </p:spPr>
+        <p:txBody>
+          <a:bodyPr wrap="none">
+            <a:spAutoFit/>
+          </a:bodyPr>
+          <a:lstStyle/>
+          <a:p>
+            <a:pPr>
               <a:spcAft>
-                <a:spcPts val="1000"/>
+                <a:spcPts val="600"/>
               </a:spcAft>
-              <a:defRPr sz="1800">
+              <a:defRPr sz="1400">
                 <a:solidFill>
                   <a:srgbClr val="070F1F"/>
                 </a:solidFill>
               </a:defRPr>
             </a:pPr>
             <a:r>
-              <a:t>Design inspiré de ChatGPT — fil de discussion centré, épuré.</a:t>
+              <a:t>• Chat en français, streaming des réponses</a:t>
             </a:r>
           </a:p>
           <a:p>
             <a:pPr>
               <a:spcAft>
-                <a:spcPts val="1000"/>
+                <a:spcPts val="600"/>
               </a:spcAft>
-              <a:defRPr sz="1800">
+              <a:defRPr sz="1400">
                 <a:solidFill>
                   <a:srgbClr val="070F1F"/>
                 </a:solidFill>
               </a:defRPr>
             </a:pPr>
             <a:r>
-              <a:t>Palette institutionnelle SUP'PTIC : bleu #1A4594, fond #070F1F.</a:t>
+              <a:t>• Suggestions de questions au démarrage</a:t>
             </a:r>
           </a:p>
           <a:p>
             <a:pPr>
               <a:spcAft>
-                <a:spcPts val="1000"/>
+                <a:spcPts val="600"/>
               </a:spcAft>
-              <a:defRPr sz="1800">
+              <a:defRPr sz="1400">
                 <a:solidFill>
                   <a:srgbClr val="070F1F"/>
                 </a:solidFill>
               </a:defRPr>
             </a:pPr>
             <a:r>
-              <a:t>Messages utilisateur en pastille bleue · réponses assistant en texte libre.</a:t>
+              <a:t>• Thème clair / sombre</a:t>
             </a:r>
           </a:p>
           <a:p>
             <a:pPr>
               <a:spcAft>
-                <a:spcPts val="1000"/>
+                <a:spcPts val="600"/>
               </a:spcAft>
-              <a:defRPr sz="1800">
+              <a:defRPr sz="1400">
                 <a:solidFill>
                   <a:srgbClr val="070F1F"/>
                 </a:solidFill>
               </a:defRPr>
             </a:pPr>
             <a:r>
-              <a:t>Composer type « prompt box » · suggestions en pills cliquables.</a:t>
+              <a:t>• Installation PWA (mobile &amp; bureau)</a:t>
             </a:r>
           </a:p>
           <a:p>
             <a:pPr>
               <a:spcAft>
-                <a:spcPts val="1000"/>
+                <a:spcPts val="600"/>
               </a:spcAft>
-              <a:defRPr sz="1800">
+              <a:defRPr sz="1400">
                 <a:solidFill>
                   <a:srgbClr val="070F1F"/>
                 </a:solidFill>
               </a:defRPr>
             </a:pPr>
             <a:r>
-              <a:t>Indicateur de statut serveur (en ligne / dégradé / hors ligne).</a:t>
+              <a:t>• Application Android (APK)</a:t>
             </a:r>
           </a:p>
           <a:p>
             <a:pPr>
               <a:spcAft>
-                <a:spcPts val="1000"/>
+                <a:spcPts val="600"/>
               </a:spcAft>
-              <a:defRPr sz="1800">
+              <a:defRPr sz="1400">
                 <a:solidFill>
                   <a:srgbClr val="070F1F"/>
                 </a:solidFill>
               </a:defRPr>
             </a:pPr>
             <a:r>
-              <a:t>Expérience identique sur navigateur, PWA installée et APK Android.</a:t>
-            </a:r>
+              <a:t>• Like / dislike + commentaire</a:t>
+            </a:r>
+          </a:p>
+        </p:txBody>
+      </p:sp>
+      <p:sp>
+        <p:nvSpPr>
+          <p:cNvPr id="5" name="TextBox 4"/>
+          <p:cNvSpPr txBox="1"/>
+          <p:nvPr/>
+        </p:nvSpPr>
+        <p:spPr>
+          <a:xfrm>
+            <a:off x="4754880" y="1645920"/>
+            <a:ext cx="3931920" cy="365760"/>
+          </a:xfrm>
+          <a:prstGeom prst="rect">
+            <a:avLst/>
+          </a:prstGeom>
+          <a:noFill/>
+        </p:spPr>
+        <p:txBody>
+          <a:bodyPr wrap="none">
+            <a:spAutoFit/>
+          </a:bodyPr>
+          <a:lstStyle/>
+          <a:p>
+            <a:pPr>
+              <a:defRPr sz="1600" b="1">
+                <a:solidFill>
+                  <a:srgbClr val="1A4594"/>
+                </a:solidFill>
+              </a:defRPr>
+            </a:pPr>
+            <a:r>
+              <a:t>Pour l'administration</a:t>
+            </a:r>
+          </a:p>
+        </p:txBody>
+      </p:sp>
+      <p:sp>
+        <p:nvSpPr>
+          <p:cNvPr id="6" name="TextBox 5"/>
+          <p:cNvSpPr txBox="1"/>
+          <p:nvPr/>
+        </p:nvSpPr>
+        <p:spPr>
+          <a:xfrm>
+            <a:off x="4754880" y="2011680"/>
+            <a:ext cx="3931920" cy="4114800"/>
+          </a:xfrm>
+          <a:prstGeom prst="rect">
+            <a:avLst/>
+          </a:prstGeom>
+          <a:noFill/>
+        </p:spPr>
+        <p:txBody>
+          <a:bodyPr wrap="none">
+            <a:spAutoFit/>
+          </a:bodyPr>
+          <a:lstStyle/>
+          <a:p>
+            <a:pPr>
+              <a:spcAft>
+                <a:spcPts val="600"/>
+              </a:spcAft>
+              <a:defRPr sz="1400">
+                <a:solidFill>
+                  <a:srgbClr val="070F1F"/>
+                </a:solidFill>
+              </a:defRPr>
+            </a:pPr>
+            <a:r>
+              <a:t>• Base FAQ catégorisée (~11 000 entrées)</a:t>
+            </a:r>
+          </a:p>
+          <a:p>
+            <a:pPr>
+              <a:spcAft>
+                <a:spcPts val="600"/>
+              </a:spcAft>
+              <a:defRPr sz="1400">
+                <a:solidFill>
+                  <a:srgbClr val="070F1F"/>
+                </a:solidFill>
+              </a:defRPr>
+            </a:pPr>
+            <a:r>
+              <a:t>• API REST documentée</a:t>
+            </a:r>
+          </a:p>
+          <a:p>
+            <a:pPr>
+              <a:spcAft>
+                <a:spcPts val="600"/>
+              </a:spcAft>
+              <a:defRPr sz="1400">
+                <a:solidFill>
+                  <a:srgbClr val="070F1F"/>
+                </a:solidFill>
+              </a:defRPr>
+            </a:pPr>
+            <a:r>
+              <a:t>• Statistiques de satisfaction</a:t>
+            </a:r>
+          </a:p>
+          <a:p>
+            <a:pPr>
+              <a:spcAft>
+                <a:spcPts val="600"/>
+              </a:spcAft>
+              <a:defRPr sz="1400">
+                <a:solidFill>
+                  <a:srgbClr val="070F1F"/>
+                </a:solidFill>
+              </a:defRPr>
+            </a:pPr>
+            <a:r>
+              <a:t>• Indexation automatique TF-IDF + FAISS</a:t>
+            </a:r>
+          </a:p>
+          <a:p>
+            <a:pPr>
+              <a:spcAft>
+                <a:spcPts val="600"/>
+              </a:spcAft>
+              <a:defRPr sz="1400">
+                <a:solidFill>
+                  <a:srgbClr val="070F1F"/>
+                </a:solidFill>
+              </a:defRPr>
+            </a:pPr>
+            <a:r>
+              <a:t>• Pipeline RAG avec Gemini (optionnel)</a:t>
+            </a:r>
+          </a:p>
+          <a:p>
+            <a:pPr>
+              <a:spcAft>
+                <a:spcPts val="600"/>
+              </a:spcAft>
+              <a:defRPr sz="1400">
+                <a:solidFill>
+                  <a:srgbClr val="070F1F"/>
+                </a:solidFill>
+              </a:defRPr>
+            </a:pPr>
+            <a:r>
+              <a:t>• Déploiement Docker, Railway ou VPS</a:t>
+            </a:r>
+          </a:p>
+        </p:txBody>
+      </p:sp>
+      <p:pic>
+        <p:nvPicPr>
+          <p:cNvPr id="7" name="Picture 6" descr="icone.png"/>
+          <p:cNvPicPr>
+            <a:picLocks noChangeAspect="1"/>
+          </p:cNvPicPr>
+          <p:nvPr/>
+        </p:nvPicPr>
+        <p:blipFill>
+          <a:blip r:embed="rId2"/>
+          <a:stretch>
+            <a:fillRect/>
+          </a:stretch>
+        </p:blipFill>
+        <p:spPr>
+          <a:xfrm>
+            <a:off x="8412480" y="6126480"/>
+            <a:ext cx="548640" cy="548640"/>
+          </a:xfrm>
+          <a:prstGeom prst="rect">
+            <a:avLst/>
+          </a:prstGeom>
+        </p:spPr>
+      </p:pic>
+      <p:sp>
+        <p:nvSpPr>
+          <p:cNvPr id="8" name="TextBox 7"/>
+          <p:cNvSpPr txBox="1"/>
+          <p:nvPr/>
+        </p:nvSpPr>
+        <p:spPr>
+          <a:xfrm>
+            <a:off x="0" y="6492240"/>
+            <a:ext cx="9144000" cy="274320"/>
+          </a:xfrm>
+          <a:prstGeom prst="rect">
+            <a:avLst/>
+          </a:prstGeom>
+          <a:noFill/>
+        </p:spPr>
+        <p:txBody>
+          <a:bodyPr wrap="none">
+            <a:spAutoFit/>
+          </a:bodyPr>
+          <a:lstStyle/>
+          <a:p>
+            <a:pPr algn="ctr">
+              <a:defRPr sz="900">
+                <a:solidFill>
+                  <a:srgbClr val="64748B"/>
+                </a:solidFill>
+              </a:defRPr>
+            </a:pPr>
+            <a:r>
+              <a:t>SUP'ONE AI — Page 6 / 17</a:t>
+            </a:r>
+          </a:p>
+        </p:txBody>
+      </p:sp>
+      <p:sp>
+        <p:nvSpPr>
+          <p:cNvPr id="9" name="Rectangle 8"/>
+          <p:cNvSpPr/>
+          <p:nvPr/>
+        </p:nvSpPr>
+        <p:spPr>
+          <a:xfrm>
+            <a:off x="0" y="6812280"/>
+            <a:ext cx="9144000" cy="45720"/>
+          </a:xfrm>
+          <a:prstGeom prst="rect">
+            <a:avLst/>
+          </a:prstGeom>
+          <a:solidFill>
+            <a:srgbClr val="E2E8F0"/>
+          </a:solidFill>
+          <a:ln>
+            <a:noFill/>
+          </a:ln>
+        </p:spPr>
+        <p:style>
+          <a:lnRef idx="1">
+            <a:schemeClr val="accent1"/>
+          </a:lnRef>
+          <a:fillRef idx="3">
+            <a:schemeClr val="accent1"/>
+          </a:fillRef>
+          <a:effectRef idx="2">
+            <a:schemeClr val="accent1"/>
+          </a:effectRef>
+          <a:fontRef idx="minor">
+            <a:schemeClr val="lt1"/>
+          </a:fontRef>
+        </p:style>
+        <p:txBody>
+          <a:bodyPr rtlCol="0" anchor="ctr"/>
+          <a:lstStyle/>
+          <a:p>
+            <a:pPr algn="ctr"/>
+          </a:p>
+        </p:txBody>
+      </p:sp>
+      <p:sp>
+        <p:nvSpPr>
+          <p:cNvPr id="10" name="Rectangle 9"/>
+          <p:cNvSpPr/>
+          <p:nvPr/>
+        </p:nvSpPr>
+        <p:spPr>
+          <a:xfrm>
+            <a:off x="0" y="6812280"/>
+            <a:ext cx="3227294" cy="45720"/>
+          </a:xfrm>
+          <a:prstGeom prst="rect">
+            <a:avLst/>
+          </a:prstGeom>
+          <a:solidFill>
+            <a:srgbClr val="3B82F6"/>
+          </a:solidFill>
+          <a:ln>
+            <a:noFill/>
+          </a:ln>
+        </p:spPr>
+        <p:style>
+          <a:lnRef idx="1">
+            <a:schemeClr val="accent1"/>
+          </a:lnRef>
+          <a:fillRef idx="3">
+            <a:schemeClr val="accent1"/>
+          </a:fillRef>
+          <a:effectRef idx="2">
+            <a:schemeClr val="accent1"/>
+          </a:effectRef>
+          <a:fontRef idx="minor">
+            <a:schemeClr val="lt1"/>
+          </a:fontRef>
+        </p:style>
+        <p:txBody>
+          <a:bodyPr rtlCol="0" anchor="ctr"/>
+          <a:lstStyle/>
+          <a:p>
+            <a:pPr algn="ctr"/>
           </a:p>
         </p:txBody>
       </p:sp>
@@ -5558,8 +7857,11 @@
 </p:sld>
 </file>
 
-<file path=ppt/slides/slide9.xml><?xml version="1.0" encoding="utf-8"?>
+<file path=ppt/slides/slide7.xml><?xml version="1.0" encoding="utf-8"?>
 <p:sld xmlns:a="http://schemas.openxmlformats.org/drawingml/2006/main" xmlns:p="http://schemas.openxmlformats.org/presentationml/2006/main" xmlns:r="http://schemas.openxmlformats.org/officeDocument/2006/relationships">
+  <p:transition>
+    <p:push dir="l"/>
+  </p:transition>
   <p:cSld>
     <p:bg>
       <p:bgPr>
@@ -5623,7 +7925,7 @@
               </a:defRPr>
             </a:pPr>
             <a:r>
-              <a:t>Déploiement &amp; mise en production</a:t>
+              <a:t>Architecture globale</a:t>
             </a:r>
           </a:p>
         </p:txBody>
@@ -5636,8 +7938,8 @@
         </p:nvSpPr>
         <p:spPr>
           <a:xfrm>
-            <a:off x="457200" y="1645920"/>
-            <a:ext cx="3931920" cy="365760"/>
+            <a:off x="457200" y="1143000"/>
+            <a:ext cx="8229600" cy="457200"/>
           </a:xfrm>
           <a:prstGeom prst="rect">
             <a:avLst/>
@@ -5651,14 +7953,14 @@
           <a:lstStyle/>
           <a:p>
             <a:pPr>
-              <a:defRPr sz="1600" b="1">
-                <a:solidFill>
-                  <a:srgbClr val="1A4594"/>
-                </a:solidFill>
-              </a:defRPr>
-            </a:pPr>
-            <a:r>
-              <a:t>Serveur SUP'PTIC (on-premise)</a:t>
+              <a:defRPr sz="1400">
+                <a:solidFill>
+                  <a:srgbClr val="64748B"/>
+                </a:solidFill>
+              </a:defRPr>
+            </a:pPr>
+            <a:r>
+              <a:t>Séparation frontend / backend / données</a:t>
             </a:r>
           </a:p>
         </p:txBody>
@@ -5671,8 +7973,8 @@
         </p:nvSpPr>
         <p:spPr>
           <a:xfrm>
-            <a:off x="457200" y="2011680"/>
-            <a:ext cx="3931920" cy="4114800"/>
+            <a:off x="457200" y="1554480"/>
+            <a:ext cx="8229600" cy="4389120"/>
           </a:xfrm>
           <a:prstGeom prst="rect">
             <a:avLst/>
@@ -5686,91 +7988,209 @@
           <a:lstStyle/>
           <a:p>
             <a:pPr>
-              <a:spcAft>
-                <a:spcPts val="600"/>
-              </a:spcAft>
-              <a:defRPr sz="1400">
+              <a:defRPr sz="1300">
                 <a:solidFill>
                   <a:srgbClr val="070F1F"/>
                 </a:solidFill>
-              </a:defRPr>
-            </a:pPr>
-            <a:r>
-              <a:t>• Docker Compose : Postgres + API + Nginx</a:t>
-            </a:r>
-          </a:p>
-          <a:p>
-            <a:pPr>
-              <a:spcAft>
-                <a:spcPts val="600"/>
-              </a:spcAft>
-              <a:defRPr sz="1400">
+                <a:latin typeface="Consolas"/>
+              </a:defRPr>
+            </a:pPr>
+            <a:r>
+              <a:t>┌─────────────────────────────────────────────────────────┐</a:t>
+            </a:r>
+          </a:p>
+          <a:p>
+            <a:pPr>
+              <a:defRPr sz="1300">
                 <a:solidFill>
                   <a:srgbClr val="070F1F"/>
                 </a:solidFill>
-              </a:defRPr>
-            </a:pPr>
-            <a:r>
-              <a:t>• Volumes persistants (BDD, index FAISS)</a:t>
-            </a:r>
-          </a:p>
-          <a:p>
-            <a:pPr>
-              <a:spcAft>
-                <a:spcPts val="600"/>
-              </a:spcAft>
-              <a:defRPr sz="1400">
+                <a:latin typeface="Consolas"/>
+              </a:defRPr>
+            </a:pPr>
+            <a:r>
+              <a:t>│  FRONTEND — React 19 + Vite + PWA + Capacitor (Android) │</a:t>
+            </a:r>
+          </a:p>
+          <a:p>
+            <a:pPr>
+              <a:defRPr sz="1300">
                 <a:solidFill>
                   <a:srgbClr val="070F1F"/>
                 </a:solidFill>
-              </a:defRPr>
-            </a:pPr>
-            <a:r>
-              <a:t>• Bootstrap : import FAQ + indexation</a:t>
-            </a:r>
-          </a:p>
-          <a:p>
-            <a:pPr>
-              <a:spcAft>
-                <a:spcPts val="600"/>
-              </a:spcAft>
-              <a:defRPr sz="1400">
+                <a:latin typeface="Consolas"/>
+              </a:defRPr>
+            </a:pPr>
+            <a:r>
+              <a:t>│  Interface ChatGPT · thèmes · feedback · suggestions    │</a:t>
+            </a:r>
+          </a:p>
+          <a:p>
+            <a:pPr>
+              <a:defRPr sz="1300">
                 <a:solidFill>
                   <a:srgbClr val="070F1F"/>
                 </a:solidFill>
-              </a:defRPr>
-            </a:pPr>
-            <a:r>
-              <a:t>• HTTPS via reverse proxy (Caddy / Certbot)</a:t>
-            </a:r>
-          </a:p>
-          <a:p>
-            <a:pPr>
-              <a:spcAft>
-                <a:spcPts val="600"/>
-              </a:spcAft>
-              <a:defRPr sz="1400">
+                <a:latin typeface="Consolas"/>
+              </a:defRPr>
+            </a:pPr>
+            <a:r>
+              <a:t>└──────────────────────────┬──────────────────────────────┘</a:t>
+            </a:r>
+          </a:p>
+          <a:p>
+            <a:pPr>
+              <a:defRPr sz="1300">
                 <a:solidFill>
                   <a:srgbClr val="070F1F"/>
                 </a:solidFill>
-              </a:defRPr>
-            </a:pPr>
-            <a:r>
-              <a:t>• Doc : docs/DOCKER.md</a:t>
-            </a:r>
-          </a:p>
-        </p:txBody>
-      </p:sp>
-      <p:sp>
-        <p:nvSpPr>
-          <p:cNvPr id="5" name="TextBox 4"/>
+                <a:latin typeface="Consolas"/>
+              </a:defRPr>
+            </a:pPr>
+            <a:r>
+              <a:t>                           │ HTTPS / REST / SSE</a:t>
+            </a:r>
+          </a:p>
+          <a:p>
+            <a:pPr>
+              <a:defRPr sz="1300">
+                <a:solidFill>
+                  <a:srgbClr val="070F1F"/>
+                </a:solidFill>
+                <a:latin typeface="Consolas"/>
+              </a:defRPr>
+            </a:pPr>
+            <a:r>
+              <a:t>┌──────────────────────────▼──────────────────────────────┐</a:t>
+            </a:r>
+          </a:p>
+          <a:p>
+            <a:pPr>
+              <a:defRPr sz="1300">
+                <a:solidFill>
+                  <a:srgbClr val="070F1F"/>
+                </a:solidFill>
+                <a:latin typeface="Consolas"/>
+              </a:defRPr>
+            </a:pPr>
+            <a:r>
+              <a:t>│  BACKEND — Django REST + Gunicorn + PostgreSQL          │</a:t>
+            </a:r>
+          </a:p>
+          <a:p>
+            <a:pPr>
+              <a:defRPr sz="1300">
+                <a:solidFill>
+                  <a:srgbClr val="070F1F"/>
+                </a:solidFill>
+                <a:latin typeface="Consolas"/>
+              </a:defRPr>
+            </a:pPr>
+            <a:r>
+              <a:t>│  Phase 1 (/api/)  ·  Gen3 RAG (/api/v2/)                │</a:t>
+            </a:r>
+          </a:p>
+          <a:p>
+            <a:pPr>
+              <a:defRPr sz="1300">
+                <a:solidFill>
+                  <a:srgbClr val="070F1F"/>
+                </a:solidFill>
+                <a:latin typeface="Consolas"/>
+              </a:defRPr>
+            </a:pPr>
+            <a:r>
+              <a:t>└──────────────────────────┬──────────────────────────────┘</a:t>
+            </a:r>
+          </a:p>
+          <a:p>
+            <a:pPr>
+              <a:defRPr sz="1300">
+                <a:solidFill>
+                  <a:srgbClr val="070F1F"/>
+                </a:solidFill>
+                <a:latin typeface="Consolas"/>
+              </a:defRPr>
+            </a:pPr>
+            <a:r>
+              <a:t>                           │</a:t>
+            </a:r>
+          </a:p>
+          <a:p>
+            <a:pPr>
+              <a:defRPr sz="1300">
+                <a:solidFill>
+                  <a:srgbClr val="070F1F"/>
+                </a:solidFill>
+                <a:latin typeface="Consolas"/>
+              </a:defRPr>
+            </a:pPr>
+            <a:r>
+              <a:t>┌──────────────────────────▼──────────────────────────────┐</a:t>
+            </a:r>
+          </a:p>
+          <a:p>
+            <a:pPr>
+              <a:defRPr sz="1300">
+                <a:solidFill>
+                  <a:srgbClr val="070F1F"/>
+                </a:solidFill>
+                <a:latin typeface="Consolas"/>
+              </a:defRPr>
+            </a:pPr>
+            <a:r>
+              <a:t>│  DONNÉES — FAQ JSON · vecteurs TF-IDF · index FAISS     │</a:t>
+            </a:r>
+          </a:p>
+          <a:p>
+            <a:pPr>
+              <a:defRPr sz="1300">
+                <a:solidFill>
+                  <a:srgbClr val="070F1F"/>
+                </a:solidFill>
+                <a:latin typeface="Consolas"/>
+              </a:defRPr>
+            </a:pPr>
+            <a:r>
+              <a:t>└─────────────────────────────────────────────────────────┘</a:t>
+            </a:r>
+          </a:p>
+        </p:txBody>
+      </p:sp>
+      <p:pic>
+        <p:nvPicPr>
+          <p:cNvPr id="5" name="Picture 4" descr="icone.png"/>
+          <p:cNvPicPr>
+            <a:picLocks noChangeAspect="1"/>
+          </p:cNvPicPr>
+          <p:nvPr/>
+        </p:nvPicPr>
+        <p:blipFill>
+          <a:blip r:embed="rId2"/>
+          <a:stretch>
+            <a:fillRect/>
+          </a:stretch>
+        </p:blipFill>
+        <p:spPr>
+          <a:xfrm>
+            <a:off x="8412480" y="6126480"/>
+            <a:ext cx="548640" cy="548640"/>
+          </a:xfrm>
+          <a:prstGeom prst="rect">
+            <a:avLst/>
+          </a:prstGeom>
+        </p:spPr>
+      </p:pic>
+      <p:sp>
+        <p:nvSpPr>
+          <p:cNvPr id="6" name="TextBox 5"/>
           <p:cNvSpPr txBox="1"/>
           <p:nvPr/>
         </p:nvSpPr>
         <p:spPr>
           <a:xfrm>
-            <a:off x="4754880" y="1645920"/>
-            <a:ext cx="3931920" cy="365760"/>
+            <a:off x="0" y="6492240"/>
+            <a:ext cx="9144000" cy="274320"/>
           </a:xfrm>
           <a:prstGeom prst="rect">
             <a:avLst/>
@@ -5783,29 +8203,333 @@
           </a:bodyPr>
           <a:lstStyle/>
           <a:p>
-            <a:pPr>
-              <a:defRPr sz="1600" b="1">
-                <a:solidFill>
-                  <a:srgbClr val="1A4594"/>
-                </a:solidFill>
-              </a:defRPr>
-            </a:pPr>
-            <a:r>
-              <a:t>Cloud (démonstration / pilote)</a:t>
-            </a:r>
-          </a:p>
-        </p:txBody>
-      </p:sp>
-      <p:sp>
-        <p:nvSpPr>
-          <p:cNvPr id="6" name="TextBox 5"/>
+            <a:pPr algn="ctr">
+              <a:defRPr sz="900">
+                <a:solidFill>
+                  <a:srgbClr val="64748B"/>
+                </a:solidFill>
+              </a:defRPr>
+            </a:pPr>
+            <a:r>
+              <a:t>SUP'ONE AI — Page 7 / 17</a:t>
+            </a:r>
+          </a:p>
+        </p:txBody>
+      </p:sp>
+      <p:sp>
+        <p:nvSpPr>
+          <p:cNvPr id="7" name="Rectangle 6"/>
+          <p:cNvSpPr/>
+          <p:nvPr/>
+        </p:nvSpPr>
+        <p:spPr>
+          <a:xfrm>
+            <a:off x="0" y="6812280"/>
+            <a:ext cx="9144000" cy="45720"/>
+          </a:xfrm>
+          <a:prstGeom prst="rect">
+            <a:avLst/>
+          </a:prstGeom>
+          <a:solidFill>
+            <a:srgbClr val="E2E8F0"/>
+          </a:solidFill>
+          <a:ln>
+            <a:noFill/>
+          </a:ln>
+        </p:spPr>
+        <p:style>
+          <a:lnRef idx="1">
+            <a:schemeClr val="accent1"/>
+          </a:lnRef>
+          <a:fillRef idx="3">
+            <a:schemeClr val="accent1"/>
+          </a:fillRef>
+          <a:effectRef idx="2">
+            <a:schemeClr val="accent1"/>
+          </a:effectRef>
+          <a:fontRef idx="minor">
+            <a:schemeClr val="lt1"/>
+          </a:fontRef>
+        </p:style>
+        <p:txBody>
+          <a:bodyPr rtlCol="0" anchor="ctr"/>
+          <a:lstStyle/>
+          <a:p>
+            <a:pPr algn="ctr"/>
+          </a:p>
+        </p:txBody>
+      </p:sp>
+      <p:sp>
+        <p:nvSpPr>
+          <p:cNvPr id="8" name="Rectangle 7"/>
+          <p:cNvSpPr/>
+          <p:nvPr/>
+        </p:nvSpPr>
+        <p:spPr>
+          <a:xfrm>
+            <a:off x="0" y="6812280"/>
+            <a:ext cx="3765176" cy="45720"/>
+          </a:xfrm>
+          <a:prstGeom prst="rect">
+            <a:avLst/>
+          </a:prstGeom>
+          <a:solidFill>
+            <a:srgbClr val="3B82F6"/>
+          </a:solidFill>
+          <a:ln>
+            <a:noFill/>
+          </a:ln>
+        </p:spPr>
+        <p:style>
+          <a:lnRef idx="1">
+            <a:schemeClr val="accent1"/>
+          </a:lnRef>
+          <a:fillRef idx="3">
+            <a:schemeClr val="accent1"/>
+          </a:fillRef>
+          <a:effectRef idx="2">
+            <a:schemeClr val="accent1"/>
+          </a:effectRef>
+          <a:fontRef idx="minor">
+            <a:schemeClr val="lt1"/>
+          </a:fontRef>
+        </p:style>
+        <p:txBody>
+          <a:bodyPr rtlCol="0" anchor="ctr"/>
+          <a:lstStyle/>
+          <a:p>
+            <a:pPr algn="ctr"/>
+          </a:p>
+        </p:txBody>
+      </p:sp>
+    </p:spTree>
+  </p:cSld>
+  <p:clrMapOvr>
+    <a:masterClrMapping/>
+  </p:clrMapOvr>
+</p:sld>
+</file>
+
+<file path=ppt/slides/slide8.xml><?xml version="1.0" encoding="utf-8"?>
+<p:sld xmlns:a="http://schemas.openxmlformats.org/drawingml/2006/main" xmlns:p="http://schemas.openxmlformats.org/presentationml/2006/main" xmlns:r="http://schemas.openxmlformats.org/officeDocument/2006/relationships">
+  <p:transition>
+    <p:push dir="t"/>
+  </p:transition>
+  <p:cSld>
+    <p:bg>
+      <p:bgPr>
+        <a:solidFill>
+          <a:srgbClr val="FFFFFF"/>
+        </a:solidFill>
+        <a:effectLst/>
+      </p:bgPr>
+    </p:bg>
+    <p:spTree>
+      <p:nvGrpSpPr>
+        <p:cNvPr id="1" name=""/>
+        <p:cNvGrpSpPr/>
+        <p:nvPr/>
+      </p:nvGrpSpPr>
+      <p:grpSpPr/>
+      <p:sp>
+        <p:nvSpPr>
+          <p:cNvPr id="2" name="Rectangle 1"/>
+          <p:cNvSpPr/>
+          <p:nvPr/>
+        </p:nvSpPr>
+        <p:spPr>
+          <a:xfrm>
+            <a:off x="0" y="0"/>
+            <a:ext cx="9144000" cy="1005840"/>
+          </a:xfrm>
+          <a:prstGeom prst="rect">
+            <a:avLst/>
+          </a:prstGeom>
+          <a:solidFill>
+            <a:srgbClr val="1A4594"/>
+          </a:solidFill>
+          <a:ln>
+            <a:noFill/>
+          </a:ln>
+        </p:spPr>
+        <p:style>
+          <a:lnRef idx="1">
+            <a:schemeClr val="accent1"/>
+          </a:lnRef>
+          <a:fillRef idx="3">
+            <a:schemeClr val="accent1"/>
+          </a:fillRef>
+          <a:effectRef idx="2">
+            <a:schemeClr val="accent1"/>
+          </a:effectRef>
+          <a:fontRef idx="minor">
+            <a:schemeClr val="lt1"/>
+          </a:fontRef>
+        </p:style>
+        <p:txBody>
+          <a:bodyPr rtlCol="0" anchor="ctr"/>
+          <a:lstStyle/>
+          <a:p>
+            <a:pPr>
+              <a:defRPr sz="2800" b="1">
+                <a:solidFill>
+                  <a:srgbClr val="FFFFFF"/>
+                </a:solidFill>
+              </a:defRPr>
+            </a:pPr>
+            <a:r>
+              <a:t>Pipeline Gen3 — RAG en 4 niveaux</a:t>
+            </a:r>
+          </a:p>
+        </p:txBody>
+      </p:sp>
+      <p:sp>
+        <p:nvSpPr>
+          <p:cNvPr id="3" name="TextBox 2"/>
           <p:cNvSpPr txBox="1"/>
           <p:nvPr/>
         </p:nvSpPr>
         <p:spPr>
           <a:xfrm>
-            <a:off x="4754880" y="2011680"/>
-            <a:ext cx="3931920" cy="4114800"/>
+            <a:off x="548640" y="1691640"/>
+            <a:ext cx="8046720" cy="4572000"/>
+          </a:xfrm>
+          <a:prstGeom prst="rect">
+            <a:avLst/>
+          </a:prstGeom>
+          <a:noFill/>
+        </p:spPr>
+        <p:txBody>
+          <a:bodyPr wrap="square">
+            <a:spAutoFit/>
+          </a:bodyPr>
+          <a:lstStyle/>
+          <a:p>
+            <a:pPr>
+              <a:spcAft>
+                <a:spcPts val="1000"/>
+              </a:spcAft>
+              <a:defRPr sz="1700">
+                <a:solidFill>
+                  <a:srgbClr val="070F1F"/>
+                </a:solidFill>
+              </a:defRPr>
+            </a:pPr>
+            <a:r>
+              <a:t>Niveau 1 — Règles conversationnelles : salutations, hors-sujet, intents métier.</a:t>
+            </a:r>
+          </a:p>
+          <a:p>
+            <a:pPr>
+              <a:spcAft>
+                <a:spcPts val="1000"/>
+              </a:spcAft>
+              <a:defRPr sz="1700">
+                <a:solidFill>
+                  <a:srgbClr val="070F1F"/>
+                </a:solidFill>
+              </a:defRPr>
+            </a:pPr>
+            <a:r>
+              <a:t>Niveau 2 — Recherche sémantique FAISS (embeddings MiniLM-L6-v2).</a:t>
+            </a:r>
+          </a:p>
+          <a:p>
+            <a:pPr>
+              <a:spcAft>
+                <a:spcPts val="1000"/>
+              </a:spcAft>
+              <a:defRPr sz="1700">
+                <a:solidFill>
+                  <a:srgbClr val="070F1F"/>
+                </a:solidFill>
+              </a:defRPr>
+            </a:pPr>
+            <a:r>
+              <a:t>Niveau 3 — Repli TF-IDF optimisé (gestion mémoire, ~11 000 FAQ).</a:t>
+            </a:r>
+          </a:p>
+          <a:p>
+            <a:pPr>
+              <a:spcAft>
+                <a:spcPts val="1000"/>
+              </a:spcAft>
+              <a:defRPr sz="1700">
+                <a:solidFill>
+                  <a:srgbClr val="070F1F"/>
+                </a:solidFill>
+              </a:defRPr>
+            </a:pPr>
+            <a:r>
+              <a:t>Niveau 4 — Génération LLM Google Gemini (réponses contextualisées).</a:t>
+            </a:r>
+          </a:p>
+          <a:p>
+            <a:pPr>
+              <a:spcAft>
+                <a:spcPts val="1000"/>
+              </a:spcAft>
+              <a:defRPr sz="1700">
+                <a:solidFill>
+                  <a:srgbClr val="070F1F"/>
+                </a:solidFill>
+              </a:defRPr>
+            </a:pPr>
+            <a:r>
+              <a:t>Cohérence question ↔ réponse : sélection intelligente + seuils de confiance.</a:t>
+            </a:r>
+          </a:p>
+          <a:p>
+            <a:pPr>
+              <a:spcAft>
+                <a:spcPts val="1000"/>
+              </a:spcAft>
+              <a:defRPr sz="1700">
+                <a:solidFill>
+                  <a:srgbClr val="070F1F"/>
+                </a:solidFill>
+              </a:defRPr>
+            </a:pPr>
+            <a:r>
+              <a:t>Si Gen3 indisponible → Phase 1 TF-IDF reste pleinement fonctionnelle.</a:t>
+            </a:r>
+          </a:p>
+        </p:txBody>
+      </p:sp>
+      <p:pic>
+        <p:nvPicPr>
+          <p:cNvPr id="4" name="Picture 3" descr="icone.png"/>
+          <p:cNvPicPr>
+            <a:picLocks noChangeAspect="1"/>
+          </p:cNvPicPr>
+          <p:nvPr/>
+        </p:nvPicPr>
+        <p:blipFill>
+          <a:blip r:embed="rId2"/>
+          <a:stretch>
+            <a:fillRect/>
+          </a:stretch>
+        </p:blipFill>
+        <p:spPr>
+          <a:xfrm>
+            <a:off x="8412480" y="6126480"/>
+            <a:ext cx="548640" cy="548640"/>
+          </a:xfrm>
+          <a:prstGeom prst="rect">
+            <a:avLst/>
+          </a:prstGeom>
+        </p:spPr>
+      </p:pic>
+      <p:sp>
+        <p:nvSpPr>
+          <p:cNvPr id="5" name="TextBox 4"/>
+          <p:cNvSpPr txBox="1"/>
+          <p:nvPr/>
+        </p:nvSpPr>
+        <p:spPr>
+          <a:xfrm>
+            <a:off x="0" y="6492240"/>
+            <a:ext cx="9144000" cy="274320"/>
           </a:xfrm>
           <a:prstGeom prst="rect">
             <a:avLst/>
@@ -5818,79 +8542,311 @@
           </a:bodyPr>
           <a:lstStyle/>
           <a:p>
-            <a:pPr>
-              <a:spcAft>
-                <a:spcPts val="600"/>
-              </a:spcAft>
-              <a:defRPr sz="1400">
-                <a:solidFill>
-                  <a:srgbClr val="070F1F"/>
-                </a:solidFill>
-              </a:defRPr>
-            </a:pPr>
-            <a:r>
-              <a:t>• Backend : Railway + PostgreSQL</a:t>
-            </a:r>
-          </a:p>
-          <a:p>
-            <a:pPr>
-              <a:spcAft>
-                <a:spcPts val="600"/>
-              </a:spcAft>
-              <a:defRPr sz="1400">
-                <a:solidFill>
-                  <a:srgbClr val="070F1F"/>
-                </a:solidFill>
-              </a:defRPr>
-            </a:pPr>
-            <a:r>
-              <a:t>• Frontend : Netlify ou Vercel (PWA)</a:t>
-            </a:r>
-          </a:p>
-          <a:p>
-            <a:pPr>
-              <a:spcAft>
-                <a:spcPts val="600"/>
-              </a:spcAft>
-              <a:defRPr sz="1400">
-                <a:solidFill>
-                  <a:srgbClr val="070F1F"/>
-                </a:solidFill>
-              </a:defRPr>
-            </a:pPr>
-            <a:r>
-              <a:t>• APK Android : build Capacitor local</a:t>
-            </a:r>
-          </a:p>
-          <a:p>
-            <a:pPr>
-              <a:spcAft>
-                <a:spcPts val="600"/>
-              </a:spcAft>
-              <a:defRPr sz="1400">
-                <a:solidFill>
-                  <a:srgbClr val="070F1F"/>
-                </a:solidFill>
-              </a:defRPr>
-            </a:pPr>
-            <a:r>
-              <a:t>• CI : tests Django + build React</a:t>
-            </a:r>
-          </a:p>
-          <a:p>
-            <a:pPr>
-              <a:spcAft>
-                <a:spcPts val="600"/>
-              </a:spcAft>
-              <a:defRPr sz="1400">
-                <a:solidFill>
-                  <a:srgbClr val="070F1F"/>
-                </a:solidFill>
-              </a:defRPr>
-            </a:pPr>
-            <a:r>
-              <a:t>• Doc : docs/DEPLOIEMENT.md</a:t>
-            </a:r>
+            <a:pPr algn="ctr">
+              <a:defRPr sz="900">
+                <a:solidFill>
+                  <a:srgbClr val="64748B"/>
+                </a:solidFill>
+              </a:defRPr>
+            </a:pPr>
+            <a:r>
+              <a:t>SUP'ONE AI — Page 8 / 17</a:t>
+            </a:r>
+          </a:p>
+        </p:txBody>
+      </p:sp>
+      <p:sp>
+        <p:nvSpPr>
+          <p:cNvPr id="6" name="Rectangle 5"/>
+          <p:cNvSpPr/>
+          <p:nvPr/>
+        </p:nvSpPr>
+        <p:spPr>
+          <a:xfrm>
+            <a:off x="0" y="6812280"/>
+            <a:ext cx="9144000" cy="45720"/>
+          </a:xfrm>
+          <a:prstGeom prst="rect">
+            <a:avLst/>
+          </a:prstGeom>
+          <a:solidFill>
+            <a:srgbClr val="E2E8F0"/>
+          </a:solidFill>
+          <a:ln>
+            <a:noFill/>
+          </a:ln>
+        </p:spPr>
+        <p:style>
+          <a:lnRef idx="1">
+            <a:schemeClr val="accent1"/>
+          </a:lnRef>
+          <a:fillRef idx="3">
+            <a:schemeClr val="accent1"/>
+          </a:fillRef>
+          <a:effectRef idx="2">
+            <a:schemeClr val="accent1"/>
+          </a:effectRef>
+          <a:fontRef idx="minor">
+            <a:schemeClr val="lt1"/>
+          </a:fontRef>
+        </p:style>
+        <p:txBody>
+          <a:bodyPr rtlCol="0" anchor="ctr"/>
+          <a:lstStyle/>
+          <a:p>
+            <a:pPr algn="ctr"/>
+          </a:p>
+        </p:txBody>
+      </p:sp>
+      <p:sp>
+        <p:nvSpPr>
+          <p:cNvPr id="7" name="Rectangle 6"/>
+          <p:cNvSpPr/>
+          <p:nvPr/>
+        </p:nvSpPr>
+        <p:spPr>
+          <a:xfrm>
+            <a:off x="0" y="6812280"/>
+            <a:ext cx="4303058" cy="45720"/>
+          </a:xfrm>
+          <a:prstGeom prst="rect">
+            <a:avLst/>
+          </a:prstGeom>
+          <a:solidFill>
+            <a:srgbClr val="3B82F6"/>
+          </a:solidFill>
+          <a:ln>
+            <a:noFill/>
+          </a:ln>
+        </p:spPr>
+        <p:style>
+          <a:lnRef idx="1">
+            <a:schemeClr val="accent1"/>
+          </a:lnRef>
+          <a:fillRef idx="3">
+            <a:schemeClr val="accent1"/>
+          </a:fillRef>
+          <a:effectRef idx="2">
+            <a:schemeClr val="accent1"/>
+          </a:effectRef>
+          <a:fontRef idx="minor">
+            <a:schemeClr val="lt1"/>
+          </a:fontRef>
+        </p:style>
+        <p:txBody>
+          <a:bodyPr rtlCol="0" anchor="ctr"/>
+          <a:lstStyle/>
+          <a:p>
+            <a:pPr algn="ctr"/>
+          </a:p>
+        </p:txBody>
+      </p:sp>
+    </p:spTree>
+  </p:cSld>
+  <p:clrMapOvr>
+    <a:masterClrMapping/>
+  </p:clrMapOvr>
+</p:sld>
+</file>
+
+<file path=ppt/slides/slide9.xml><?xml version="1.0" encoding="utf-8"?>
+<p:sld xmlns:a="http://schemas.openxmlformats.org/drawingml/2006/main" xmlns:p="http://schemas.openxmlformats.org/presentationml/2006/main" xmlns:r="http://schemas.openxmlformats.org/officeDocument/2006/relationships">
+  <p:transition>
+    <p:push dir="l"/>
+  </p:transition>
+  <p:cSld>
+    <p:bg>
+      <p:bgPr>
+        <a:solidFill>
+          <a:srgbClr val="1A4594"/>
+        </a:solidFill>
+        <a:effectLst/>
+      </p:bgPr>
+    </p:bg>
+    <p:spTree>
+      <p:nvGrpSpPr>
+        <p:cNvPr id="1" name=""/>
+        <p:cNvGrpSpPr/>
+        <p:nvPr/>
+      </p:nvGrpSpPr>
+      <p:grpSpPr/>
+      <p:sp>
+        <p:nvSpPr>
+          <p:cNvPr id="2" name="TextBox 1"/>
+          <p:cNvSpPr txBox="1"/>
+          <p:nvPr/>
+        </p:nvSpPr>
+        <p:spPr>
+          <a:xfrm>
+            <a:off x="457200" y="2926080"/>
+            <a:ext cx="8229600" cy="1005840"/>
+          </a:xfrm>
+          <a:prstGeom prst="rect">
+            <a:avLst/>
+          </a:prstGeom>
+          <a:noFill/>
+        </p:spPr>
+        <p:txBody>
+          <a:bodyPr wrap="none">
+            <a:spAutoFit/>
+          </a:bodyPr>
+          <a:lstStyle/>
+          <a:p>
+            <a:pPr algn="ctr">
+              <a:defRPr sz="4000" b="1">
+                <a:solidFill>
+                  <a:srgbClr val="FFFFFF"/>
+                </a:solidFill>
+              </a:defRPr>
+            </a:pPr>
+            <a:r>
+              <a:t>III. Technologies &amp; Design</a:t>
+            </a:r>
+          </a:p>
+        </p:txBody>
+      </p:sp>
+      <p:pic>
+        <p:nvPicPr>
+          <p:cNvPr id="3" name="Picture 2" descr="icone.png"/>
+          <p:cNvPicPr>
+            <a:picLocks noChangeAspect="1"/>
+          </p:cNvPicPr>
+          <p:nvPr/>
+        </p:nvPicPr>
+        <p:blipFill>
+          <a:blip r:embed="rId2"/>
+          <a:stretch>
+            <a:fillRect/>
+          </a:stretch>
+        </p:blipFill>
+        <p:spPr>
+          <a:xfrm>
+            <a:off x="8412480" y="6126480"/>
+            <a:ext cx="548640" cy="548640"/>
+          </a:xfrm>
+          <a:prstGeom prst="rect">
+            <a:avLst/>
+          </a:prstGeom>
+        </p:spPr>
+      </p:pic>
+      <p:sp>
+        <p:nvSpPr>
+          <p:cNvPr id="4" name="TextBox 3"/>
+          <p:cNvSpPr txBox="1"/>
+          <p:nvPr/>
+        </p:nvSpPr>
+        <p:spPr>
+          <a:xfrm>
+            <a:off x="0" y="6492240"/>
+            <a:ext cx="9144000" cy="274320"/>
+          </a:xfrm>
+          <a:prstGeom prst="rect">
+            <a:avLst/>
+          </a:prstGeom>
+          <a:noFill/>
+        </p:spPr>
+        <p:txBody>
+          <a:bodyPr wrap="none">
+            <a:spAutoFit/>
+          </a:bodyPr>
+          <a:lstStyle/>
+          <a:p>
+            <a:pPr algn="ctr">
+              <a:defRPr sz="900">
+                <a:solidFill>
+                  <a:srgbClr val="64748B"/>
+                </a:solidFill>
+              </a:defRPr>
+            </a:pPr>
+            <a:r>
+              <a:t>SUP'ONE AI — Page 9 / 17</a:t>
+            </a:r>
+          </a:p>
+        </p:txBody>
+      </p:sp>
+      <p:sp>
+        <p:nvSpPr>
+          <p:cNvPr id="5" name="Rectangle 4"/>
+          <p:cNvSpPr/>
+          <p:nvPr/>
+        </p:nvSpPr>
+        <p:spPr>
+          <a:xfrm>
+            <a:off x="0" y="6812280"/>
+            <a:ext cx="9144000" cy="45720"/>
+          </a:xfrm>
+          <a:prstGeom prst="rect">
+            <a:avLst/>
+          </a:prstGeom>
+          <a:solidFill>
+            <a:srgbClr val="E2E8F0"/>
+          </a:solidFill>
+          <a:ln>
+            <a:noFill/>
+          </a:ln>
+        </p:spPr>
+        <p:style>
+          <a:lnRef idx="1">
+            <a:schemeClr val="accent1"/>
+          </a:lnRef>
+          <a:fillRef idx="3">
+            <a:schemeClr val="accent1"/>
+          </a:fillRef>
+          <a:effectRef idx="2">
+            <a:schemeClr val="accent1"/>
+          </a:effectRef>
+          <a:fontRef idx="minor">
+            <a:schemeClr val="lt1"/>
+          </a:fontRef>
+        </p:style>
+        <p:txBody>
+          <a:bodyPr rtlCol="0" anchor="ctr"/>
+          <a:lstStyle/>
+          <a:p>
+            <a:pPr algn="ctr"/>
+          </a:p>
+        </p:txBody>
+      </p:sp>
+      <p:sp>
+        <p:nvSpPr>
+          <p:cNvPr id="6" name="Rectangle 5"/>
+          <p:cNvSpPr/>
+          <p:nvPr/>
+        </p:nvSpPr>
+        <p:spPr>
+          <a:xfrm>
+            <a:off x="0" y="6812280"/>
+            <a:ext cx="4840941" cy="45720"/>
+          </a:xfrm>
+          <a:prstGeom prst="rect">
+            <a:avLst/>
+          </a:prstGeom>
+          <a:solidFill>
+            <a:srgbClr val="3B82F6"/>
+          </a:solidFill>
+          <a:ln>
+            <a:noFill/>
+          </a:ln>
+        </p:spPr>
+        <p:style>
+          <a:lnRef idx="1">
+            <a:schemeClr val="accent1"/>
+          </a:lnRef>
+          <a:fillRef idx="3">
+            <a:schemeClr val="accent1"/>
+          </a:fillRef>
+          <a:effectRef idx="2">
+            <a:schemeClr val="accent1"/>
+          </a:effectRef>
+          <a:fontRef idx="minor">
+            <a:schemeClr val="lt1"/>
+          </a:fontRef>
+        </p:style>
+        <p:txBody>
+          <a:bodyPr rtlCol="0" anchor="ctr"/>
+          <a:lstStyle/>
+          <a:p>
+            <a:pPr algn="ctr"/>
           </a:p>
         </p:txBody>
       </p:sp>
